--- a/lecons/F5/46_F5_M3_L40_Migration_Patterns_in_Cameroon.pptx
+++ b/lecons/F5/46_F5_M3_L40_Migration_Patterns_in_Cameroon.pptx
@@ -57,9 +57,13 @@
     <p:sldId id="305" r:id="rId51"/>
     <p:sldId id="306" r:id="rId52"/>
     <p:sldId id="307" r:id="rId53"/>
+    <p:sldId id="308" r:id="rId54"/>
+    <p:sldId id="309" r:id="rId55"/>
+    <p:sldId id="310" r:id="rId56"/>
+    <p:sldId id="311" r:id="rId57"/>
   </p:sldIdLst>
   <p:notesMasterIdLst>
-    <p:notesMasterId r:id="rId54"/>
+    <p:notesMasterId r:id="rId58"/>
   </p:notesMasterIdLst>
   <p:sldSz cx="12192000" cy="6858000"/>
   <p:notesSz cx="6858000" cy="12192000"/>
@@ -3281,7 +3285,7 @@
           <a:p>
             <a:r>
               <a:rPr lang="en-US" dirty="0"/>
-              <a:t>Let us copy Factors of Rural Exodus. Rural exodus is explained by push and pull factors. On this slide we have Push factors and Pull factors. Write each point on a new line, with the key term first, and explain it in your own words when we revise. When you finish, we go to the next slide.</a:t>
+              <a:t>Let us copy Push Factors. People are pushed out of villages by the following factors. On this slide we have Poverty and Land shortage. Write each point on a new line, with the key term first, and explain it in your own words when we revise. When you finish, we go to the next slide.</a:t>
             </a:r>
             <a:endParaRPr lang="en-US" dirty="0"/>
           </a:p>
@@ -3369,7 +3373,7 @@
           <a:p>
             <a:r>
               <a:rPr lang="en-US" dirty="0"/>
-              <a:t>We continue with Factors of Rural Exodus. On this slide we have Solutions. Write each point on a new line, with the key term first, and explain it in your own words when we revise.</a:t>
+              <a:t>We continue with Push Factors. On this slide we have Lack of amenities and Drought and insecurity. Write each point on a new line, with the key term first, and explain it in your own words when we revise.</a:t>
             </a:r>
             <a:endParaRPr lang="en-US" dirty="0"/>
           </a:p>
@@ -3545,7 +3549,7 @@
           <a:p>
             <a:r>
               <a:rPr lang="en-US" dirty="0"/>
-              <a:t>Now let us check what you have understood. Question 1: Name two destinations of migrants in Cameroon. Answer in your exercise book.</a:t>
+              <a:t>Let us copy Pull Factors. People are attracted to towns by the following factors. On this slide we have Jobs and Schools and hospitals. Write each point on a new line, with the key term first, and explain it in your own words when we revise. When you finish, we go to the next slide.</a:t>
             </a:r>
             <a:endParaRPr lang="en-US" dirty="0"/>
           </a:p>
@@ -3633,7 +3637,7 @@
           <a:p>
             <a:r>
               <a:rPr lang="en-US" dirty="0"/>
-              <a:t>The expected answer is: douala and Yaoundé. If you got it right, well done.</a:t>
+              <a:t>We continue with Pull Factors. On this slide we have Modern life. Write each point on a new line, with the key term first, and explain it in your own words when we revise.</a:t>
             </a:r>
             <a:endParaRPr lang="en-US" dirty="0"/>
           </a:p>
@@ -3721,7 +3725,7 @@
           <a:p>
             <a:r>
               <a:rPr lang="en-US" dirty="0"/>
-              <a:t>Now let us check what you have understood. Question 2: Give two push and two pull factors. Answer in your exercise book.</a:t>
+              <a:t>Let us copy Solutions. Rural exodus can be reduced by the following solutions. On this slide we have Rural development and Amenities. Write each point on a new line, with the key term first, and explain it in your own words when we revise. When you finish, we go to the next slide.</a:t>
             </a:r>
             <a:endParaRPr lang="en-US" dirty="0"/>
           </a:p>
@@ -3809,7 +3813,7 @@
           <a:p>
             <a:r>
               <a:rPr lang="en-US" dirty="0"/>
-              <a:t>The expected answer is: poverty and land shortage; jobs and schools. If you got it right, well done.</a:t>
+              <a:t>We continue with Solutions. On this slide we have Cultural festivals. Write each point on a new line, with the key term first, and explain it in your own words when we revise.</a:t>
             </a:r>
             <a:endParaRPr lang="en-US" dirty="0"/>
           </a:p>
@@ -3897,7 +3901,7 @@
           <a:p>
             <a:r>
               <a:rPr lang="en-US" dirty="0"/>
-              <a:t>Take your time to copy this part; we will continue together.</a:t>
+              <a:t>Now let us check what you have understood. Question 1: Name two destinations of migrants in Cameroon. Answer in your exercise book.</a:t>
             </a:r>
             <a:endParaRPr lang="en-US" dirty="0"/>
           </a:p>
@@ -3985,7 +3989,7 @@
           <a:p>
             <a:r>
               <a:rPr lang="en-US" dirty="0"/>
-              <a:t>For those who need more practice, fill in the blanks in your exercise book. The answers are: number 1, exodus; number 2, Douala; number 3, push.</a:t>
+              <a:t>The expected answer is: douala and Yaoundé. If you got it right, well done.</a:t>
             </a:r>
             <a:endParaRPr lang="en-US" dirty="0"/>
           </a:p>
@@ -4073,7 +4077,7 @@
           <a:p>
             <a:r>
               <a:rPr lang="en-US" dirty="0"/>
-              <a:t>For your homework: Propose three actions to reduce rural exodus in your region. We shall correct it at the beginning of our next lesson.</a:t>
+              <a:t>Now let us check what you have understood. Question 2: Give two push and two pull factors. Answer in your exercise book.</a:t>
             </a:r>
             <a:endParaRPr lang="en-US" dirty="0"/>
           </a:p>
@@ -4161,7 +4165,7 @@
           <a:p>
             <a:r>
               <a:rPr lang="en-US" dirty="0"/>
-              <a:t>Our next lesson will be on Practical Work 4: Calculation of the Determinants of Population Growth (Indices). Thank you for your attention, and see you next time.</a:t>
+              <a:t>The expected answer is: poverty and land shortage; jobs and schools. If you got it right, well done.</a:t>
             </a:r>
             <a:endParaRPr lang="en-US" dirty="0"/>
           </a:p>
@@ -4249,7 +4253,7 @@
           <a:p>
             <a:r>
               <a:rPr lang="en-US" dirty="0"/>
-              <a:t>Let us play the bilingual game. I say a word in English, and you give me the French word. Then we do the reverse.</a:t>
+              <a:t>Take your time to copy this part; we will continue together.</a:t>
             </a:r>
             <a:endParaRPr lang="en-US" dirty="0"/>
           </a:p>
@@ -4337,7 +4341,7 @@
           <a:p>
             <a:r>
               <a:rPr lang="en-US" dirty="0"/>
-              <a:t>I record this information in the official logbook of the class after the lesson.</a:t>
+              <a:t>For those who need more practice, fill in the blanks in your exercise book. The answers are: number 1, exodus; number 2, Douala; number 3, push.</a:t>
             </a:r>
             <a:endParaRPr lang="en-US" dirty="0"/>
           </a:p>
@@ -4513,7 +4517,7 @@
           <a:p>
             <a:r>
               <a:rPr lang="en-US" dirty="0"/>
-              <a:t>I complete the second page of the logbook: the matter taught, the evaluation, the homework and the attendance.</a:t>
+              <a:t>For your homework: Propose three actions to reduce rural exodus in your region. We shall correct it at the beginning of our next lesson.</a:t>
             </a:r>
             <a:endParaRPr lang="en-US" dirty="0"/>
           </a:p>
@@ -4601,7 +4605,7 @@
           <a:p>
             <a:r>
               <a:rPr lang="en-US" dirty="0"/>
-              <a:t>This slide is for me, the teacher: it gives the timing of the lesson and what to do if the projector is not available.</a:t>
+              <a:t>Our next lesson will be on Practical Work 4: Calculation of the Determinants of Population Growth (Indices). Thank you for your attention, and see you next time.</a:t>
             </a:r>
             <a:endParaRPr lang="en-US" dirty="0"/>
           </a:p>
@@ -4689,7 +4693,7 @@
           <a:p>
             <a:r>
               <a:rPr lang="en-US" dirty="0"/>
-              <a:t>These are the references and picture credits used to prepare this lesson.</a:t>
+              <a:t>Let us play the bilingual game. I say a word in English, and you give me the French word. Then we do the reverse.</a:t>
             </a:r>
             <a:endParaRPr lang="en-US" dirty="0"/>
           </a:p>
@@ -4713,6 +4717,358 @@
             <a:fld id="{F7021451-1387-4CA6-816F-3879F97B5CBC}" type="slidenum">
               <a:rPr lang="en-US"/>
               <a:t>52</a:t>
+            </a:fld>
+            <a:endParaRPr lang="en-US"/>
+          </a:p>
+        </p:txBody>
+      </p:sp>
+    </p:spTree>
+    <p:extLst>
+      <p:ext uri="{BB962C8B-B14F-4D97-AF65-F5344CB8AC3E}">
+        <p14:creationId xmlns:p14="http://schemas.microsoft.com/office/powerpoint/2010/main" val="1024086991"/>
+      </p:ext>
+    </p:extLst>
+  </p:cSld>
+  <p:clrMapOvr>
+    <a:masterClrMapping/>
+  </p:clrMapOvr>
+</p:notes>
+</file>
+
+<file path=ppt/notesSlides/notesSlide53.xml><?xml version="1.0" encoding="utf-8"?>
+<p:notes xmlns:a="http://schemas.openxmlformats.org/drawingml/2006/main" xmlns:r="http://schemas.openxmlformats.org/officeDocument/2006/relationships" xmlns:p="http://schemas.openxmlformats.org/presentationml/2006/main">
+  <p:cSld>
+    <p:spTree>
+      <p:nvGrpSpPr>
+        <p:cNvPr id="1" name=""/>
+        <p:cNvGrpSpPr/>
+        <p:nvPr/>
+      </p:nvGrpSpPr>
+      <p:grpSpPr>
+        <a:xfrm>
+          <a:off x="0" y="0"/>
+          <a:ext cx="0" cy="0"/>
+          <a:chOff x="0" y="0"/>
+          <a:chExt cx="0" cy="0"/>
+        </a:xfrm>
+      </p:grpSpPr>
+      <p:sp>
+        <p:nvSpPr>
+          <p:cNvPr id="2" name="Slide Image Placeholder 1"/>
+          <p:cNvSpPr>
+            <a:spLocks noGrp="1" noRot="1" noChangeAspect="1"/>
+          </p:cNvSpPr>
+          <p:nvPr>
+            <p:ph type="sldImg"/>
+          </p:nvPr>
+        </p:nvSpPr>
+        <p:spPr/>
+      </p:sp>
+      <p:sp>
+        <p:nvSpPr>
+          <p:cNvPr id="3" name="Notes Placeholder 2"/>
+          <p:cNvSpPr>
+            <a:spLocks noGrp="1"/>
+          </p:cNvSpPr>
+          <p:nvPr>
+            <p:ph type="body" idx="1"/>
+          </p:nvPr>
+        </p:nvSpPr>
+        <p:spPr/>
+        <p:txBody>
+          <a:bodyPr/>
+          <a:lstStyle/>
+          <a:p>
+            <a:r>
+              <a:rPr lang="en-US" dirty="0"/>
+              <a:t>I record this information in the official logbook of the class after the lesson.</a:t>
+            </a:r>
+            <a:endParaRPr lang="en-US" dirty="0"/>
+          </a:p>
+        </p:txBody>
+      </p:sp>
+      <p:sp>
+        <p:nvSpPr>
+          <p:cNvPr id="4" name="Slide Number Placeholder 3"/>
+          <p:cNvSpPr>
+            <a:spLocks noGrp="1"/>
+          </p:cNvSpPr>
+          <p:nvPr>
+            <p:ph type="sldNum" sz="quarter" idx="10"/>
+          </p:nvPr>
+        </p:nvSpPr>
+        <p:spPr/>
+        <p:txBody>
+          <a:bodyPr/>
+          <a:lstStyle/>
+          <a:p>
+            <a:fld id="{F7021451-1387-4CA6-816F-3879F97B5CBC}" type="slidenum">
+              <a:rPr lang="en-US"/>
+              <a:t>53</a:t>
+            </a:fld>
+            <a:endParaRPr lang="en-US"/>
+          </a:p>
+        </p:txBody>
+      </p:sp>
+    </p:spTree>
+    <p:extLst>
+      <p:ext uri="{BB962C8B-B14F-4D97-AF65-F5344CB8AC3E}">
+        <p14:creationId xmlns:p14="http://schemas.microsoft.com/office/powerpoint/2010/main" val="1024086991"/>
+      </p:ext>
+    </p:extLst>
+  </p:cSld>
+  <p:clrMapOvr>
+    <a:masterClrMapping/>
+  </p:clrMapOvr>
+</p:notes>
+</file>
+
+<file path=ppt/notesSlides/notesSlide54.xml><?xml version="1.0" encoding="utf-8"?>
+<p:notes xmlns:a="http://schemas.openxmlformats.org/drawingml/2006/main" xmlns:r="http://schemas.openxmlformats.org/officeDocument/2006/relationships" xmlns:p="http://schemas.openxmlformats.org/presentationml/2006/main">
+  <p:cSld>
+    <p:spTree>
+      <p:nvGrpSpPr>
+        <p:cNvPr id="1" name=""/>
+        <p:cNvGrpSpPr/>
+        <p:nvPr/>
+      </p:nvGrpSpPr>
+      <p:grpSpPr>
+        <a:xfrm>
+          <a:off x="0" y="0"/>
+          <a:ext cx="0" cy="0"/>
+          <a:chOff x="0" y="0"/>
+          <a:chExt cx="0" cy="0"/>
+        </a:xfrm>
+      </p:grpSpPr>
+      <p:sp>
+        <p:nvSpPr>
+          <p:cNvPr id="2" name="Slide Image Placeholder 1"/>
+          <p:cNvSpPr>
+            <a:spLocks noGrp="1" noRot="1" noChangeAspect="1"/>
+          </p:cNvSpPr>
+          <p:nvPr>
+            <p:ph type="sldImg"/>
+          </p:nvPr>
+        </p:nvSpPr>
+        <p:spPr/>
+      </p:sp>
+      <p:sp>
+        <p:nvSpPr>
+          <p:cNvPr id="3" name="Notes Placeholder 2"/>
+          <p:cNvSpPr>
+            <a:spLocks noGrp="1"/>
+          </p:cNvSpPr>
+          <p:nvPr>
+            <p:ph type="body" idx="1"/>
+          </p:nvPr>
+        </p:nvSpPr>
+        <p:spPr/>
+        <p:txBody>
+          <a:bodyPr/>
+          <a:lstStyle/>
+          <a:p>
+            <a:r>
+              <a:rPr lang="en-US" dirty="0"/>
+              <a:t>I complete the second page of the logbook: the matter taught, the evaluation, the homework and the attendance.</a:t>
+            </a:r>
+            <a:endParaRPr lang="en-US" dirty="0"/>
+          </a:p>
+        </p:txBody>
+      </p:sp>
+      <p:sp>
+        <p:nvSpPr>
+          <p:cNvPr id="4" name="Slide Number Placeholder 3"/>
+          <p:cNvSpPr>
+            <a:spLocks noGrp="1"/>
+          </p:cNvSpPr>
+          <p:nvPr>
+            <p:ph type="sldNum" sz="quarter" idx="10"/>
+          </p:nvPr>
+        </p:nvSpPr>
+        <p:spPr/>
+        <p:txBody>
+          <a:bodyPr/>
+          <a:lstStyle/>
+          <a:p>
+            <a:fld id="{F7021451-1387-4CA6-816F-3879F97B5CBC}" type="slidenum">
+              <a:rPr lang="en-US"/>
+              <a:t>54</a:t>
+            </a:fld>
+            <a:endParaRPr lang="en-US"/>
+          </a:p>
+        </p:txBody>
+      </p:sp>
+    </p:spTree>
+    <p:extLst>
+      <p:ext uri="{BB962C8B-B14F-4D97-AF65-F5344CB8AC3E}">
+        <p14:creationId xmlns:p14="http://schemas.microsoft.com/office/powerpoint/2010/main" val="1024086991"/>
+      </p:ext>
+    </p:extLst>
+  </p:cSld>
+  <p:clrMapOvr>
+    <a:masterClrMapping/>
+  </p:clrMapOvr>
+</p:notes>
+</file>
+
+<file path=ppt/notesSlides/notesSlide55.xml><?xml version="1.0" encoding="utf-8"?>
+<p:notes xmlns:a="http://schemas.openxmlformats.org/drawingml/2006/main" xmlns:r="http://schemas.openxmlformats.org/officeDocument/2006/relationships" xmlns:p="http://schemas.openxmlformats.org/presentationml/2006/main">
+  <p:cSld>
+    <p:spTree>
+      <p:nvGrpSpPr>
+        <p:cNvPr id="1" name=""/>
+        <p:cNvGrpSpPr/>
+        <p:nvPr/>
+      </p:nvGrpSpPr>
+      <p:grpSpPr>
+        <a:xfrm>
+          <a:off x="0" y="0"/>
+          <a:ext cx="0" cy="0"/>
+          <a:chOff x="0" y="0"/>
+          <a:chExt cx="0" cy="0"/>
+        </a:xfrm>
+      </p:grpSpPr>
+      <p:sp>
+        <p:nvSpPr>
+          <p:cNvPr id="2" name="Slide Image Placeholder 1"/>
+          <p:cNvSpPr>
+            <a:spLocks noGrp="1" noRot="1" noChangeAspect="1"/>
+          </p:cNvSpPr>
+          <p:nvPr>
+            <p:ph type="sldImg"/>
+          </p:nvPr>
+        </p:nvSpPr>
+        <p:spPr/>
+      </p:sp>
+      <p:sp>
+        <p:nvSpPr>
+          <p:cNvPr id="3" name="Notes Placeholder 2"/>
+          <p:cNvSpPr>
+            <a:spLocks noGrp="1"/>
+          </p:cNvSpPr>
+          <p:nvPr>
+            <p:ph type="body" idx="1"/>
+          </p:nvPr>
+        </p:nvSpPr>
+        <p:spPr/>
+        <p:txBody>
+          <a:bodyPr/>
+          <a:lstStyle/>
+          <a:p>
+            <a:r>
+              <a:rPr lang="en-US" dirty="0"/>
+              <a:t>This slide is for me, the teacher: it gives the timing of the lesson and what to do if the projector is not available.</a:t>
+            </a:r>
+            <a:endParaRPr lang="en-US" dirty="0"/>
+          </a:p>
+        </p:txBody>
+      </p:sp>
+      <p:sp>
+        <p:nvSpPr>
+          <p:cNvPr id="4" name="Slide Number Placeholder 3"/>
+          <p:cNvSpPr>
+            <a:spLocks noGrp="1"/>
+          </p:cNvSpPr>
+          <p:nvPr>
+            <p:ph type="sldNum" sz="quarter" idx="10"/>
+          </p:nvPr>
+        </p:nvSpPr>
+        <p:spPr/>
+        <p:txBody>
+          <a:bodyPr/>
+          <a:lstStyle/>
+          <a:p>
+            <a:fld id="{F7021451-1387-4CA6-816F-3879F97B5CBC}" type="slidenum">
+              <a:rPr lang="en-US"/>
+              <a:t>55</a:t>
+            </a:fld>
+            <a:endParaRPr lang="en-US"/>
+          </a:p>
+        </p:txBody>
+      </p:sp>
+    </p:spTree>
+    <p:extLst>
+      <p:ext uri="{BB962C8B-B14F-4D97-AF65-F5344CB8AC3E}">
+        <p14:creationId xmlns:p14="http://schemas.microsoft.com/office/powerpoint/2010/main" val="1024086991"/>
+      </p:ext>
+    </p:extLst>
+  </p:cSld>
+  <p:clrMapOvr>
+    <a:masterClrMapping/>
+  </p:clrMapOvr>
+</p:notes>
+</file>
+
+<file path=ppt/notesSlides/notesSlide56.xml><?xml version="1.0" encoding="utf-8"?>
+<p:notes xmlns:a="http://schemas.openxmlformats.org/drawingml/2006/main" xmlns:r="http://schemas.openxmlformats.org/officeDocument/2006/relationships" xmlns:p="http://schemas.openxmlformats.org/presentationml/2006/main">
+  <p:cSld>
+    <p:spTree>
+      <p:nvGrpSpPr>
+        <p:cNvPr id="1" name=""/>
+        <p:cNvGrpSpPr/>
+        <p:nvPr/>
+      </p:nvGrpSpPr>
+      <p:grpSpPr>
+        <a:xfrm>
+          <a:off x="0" y="0"/>
+          <a:ext cx="0" cy="0"/>
+          <a:chOff x="0" y="0"/>
+          <a:chExt cx="0" cy="0"/>
+        </a:xfrm>
+      </p:grpSpPr>
+      <p:sp>
+        <p:nvSpPr>
+          <p:cNvPr id="2" name="Slide Image Placeholder 1"/>
+          <p:cNvSpPr>
+            <a:spLocks noGrp="1" noRot="1" noChangeAspect="1"/>
+          </p:cNvSpPr>
+          <p:nvPr>
+            <p:ph type="sldImg"/>
+          </p:nvPr>
+        </p:nvSpPr>
+        <p:spPr/>
+      </p:sp>
+      <p:sp>
+        <p:nvSpPr>
+          <p:cNvPr id="3" name="Notes Placeholder 2"/>
+          <p:cNvSpPr>
+            <a:spLocks noGrp="1"/>
+          </p:cNvSpPr>
+          <p:nvPr>
+            <p:ph type="body" idx="1"/>
+          </p:nvPr>
+        </p:nvSpPr>
+        <p:spPr/>
+        <p:txBody>
+          <a:bodyPr/>
+          <a:lstStyle/>
+          <a:p>
+            <a:r>
+              <a:rPr lang="en-US" dirty="0"/>
+              <a:t>These are the references and picture credits used to prepare this lesson.</a:t>
+            </a:r>
+            <a:endParaRPr lang="en-US" dirty="0"/>
+          </a:p>
+        </p:txBody>
+      </p:sp>
+      <p:sp>
+        <p:nvSpPr>
+          <p:cNvPr id="4" name="Slide Number Placeholder 3"/>
+          <p:cNvSpPr>
+            <a:spLocks noGrp="1"/>
+          </p:cNvSpPr>
+          <p:nvPr>
+            <p:ph type="sldNum" sz="quarter" idx="10"/>
+          </p:nvPr>
+        </p:nvSpPr>
+        <p:spPr/>
+        <p:txBody>
+          <a:bodyPr/>
+          <a:lstStyle/>
+          <a:p>
+            <a:fld id="{F7021451-1387-4CA6-816F-3879F97B5CBC}" type="slidenum">
+              <a:rPr lang="en-US"/>
+              <a:t>56</a:t>
             </a:fld>
             <a:endParaRPr lang="en-US"/>
           </a:p>
@@ -14258,7 +14614,7 @@
         <p:spPr>
           <a:xfrm>
             <a:off x="0" y="658368"/>
-            <a:ext cx="2468880" cy="5833872"/>
+            <a:ext cx="3840480" cy="5833872"/>
           </a:xfrm>
           <a:prstGeom prst="rect">
             <a:avLst/>
@@ -14273,8 +14629,8 @@
         </p:nvSpPr>
         <p:spPr>
           <a:xfrm>
-            <a:off x="2697480" y="1005840"/>
-            <a:ext cx="9174175" cy="731520"/>
+            <a:off x="4069080" y="1005840"/>
+            <a:ext cx="7802575" cy="731520"/>
           </a:xfrm>
           <a:prstGeom prst="rect">
             <a:avLst/>
@@ -14314,8 +14670,47 @@
         </p:nvSpPr>
         <p:spPr>
           <a:xfrm>
-            <a:off x="2697480" y="1783080"/>
-            <a:ext cx="9174175" cy="4663440"/>
+            <a:off x="4069080" y="1737360"/>
+            <a:ext cx="7802575" cy="457200"/>
+          </a:xfrm>
+          <a:prstGeom prst="rect">
+            <a:avLst/>
+          </a:prstGeom>
+          <a:noFill/>
+          <a:ln/>
+        </p:spPr>
+        <p:txBody>
+          <a:bodyPr wrap="square" lIns="0" tIns="0" rIns="0" bIns="0" rtlCol="0" anchor="ctr"/>
+          <a:lstStyle/>
+          <a:p>
+            <a:pPr algn="l" indent="0" marL="0">
+              <a:buNone/>
+            </a:pPr>
+            <a:r>
+              <a:rPr lang="en-US" sz="3200" b="1" dirty="0">
+                <a:solidFill>
+                  <a:srgbClr val="990011"/>
+                </a:solidFill>
+                <a:latin typeface="Times New Roman" pitchFamily="34" charset="0"/>
+                <a:ea typeface="Times New Roman" pitchFamily="34" charset="-122"/>
+                <a:cs typeface="Times New Roman" pitchFamily="34" charset="-120"/>
+              </a:rPr>
+              <a:t>A) Push Factors</a:t>
+            </a:r>
+            <a:endParaRPr lang="en-US" sz="3200" dirty="0"/>
+          </a:p>
+        </p:txBody>
+      </p:sp>
+      <p:sp>
+        <p:nvSpPr>
+          <p:cNvPr id="6" name="Text 3"/>
+          <p:cNvSpPr/>
+          <p:nvPr/>
+        </p:nvSpPr>
+        <p:spPr>
+          <a:xfrm>
+            <a:off x="4069080" y="2240280"/>
+            <a:ext cx="7802575" cy="4206240"/>
           </a:xfrm>
           <a:prstGeom prst="rect">
             <a:avLst/>
@@ -14342,7 +14737,7 @@
                 <a:ea typeface="Times New Roman" pitchFamily="34" charset="-122"/>
                 <a:cs typeface="Times New Roman" pitchFamily="34" charset="-120"/>
               </a:rPr>
-              <a:t>Rural exodus is explained by push and pull factors:</a:t>
+              <a:t>People are pushed out of villages by the following factors:</a:t>
             </a:r>
             <a:endParaRPr lang="en-US" sz="4000" dirty="0"/>
           </a:p>
@@ -14362,7 +14757,7 @@
                 <a:ea typeface="Times New Roman" pitchFamily="34" charset="-122"/>
                 <a:cs typeface="Times New Roman" pitchFamily="34" charset="-120"/>
               </a:rPr>
-              <a:t>Push factors: </a:t>
+              <a:t>Poverty: </a:t>
             </a:r>
             <a:pPr algn="l" indent="0" marL="0">
               <a:spcAft>
@@ -14379,7 +14774,7 @@
                 <a:ea typeface="Times New Roman" pitchFamily="34" charset="-122"/>
                 <a:cs typeface="Times New Roman" pitchFamily="34" charset="-120"/>
               </a:rPr>
-              <a:t>Poverty, land shortage, lack of amenities, drought and insecurity push people.</a:t>
+              <a:t>Farming brings little money.</a:t>
             </a:r>
             <a:endParaRPr lang="en-US" sz="4000" dirty="0"/>
           </a:p>
@@ -14399,7 +14794,7 @@
                 <a:ea typeface="Times New Roman" pitchFamily="34" charset="-122"/>
                 <a:cs typeface="Times New Roman" pitchFamily="34" charset="-120"/>
               </a:rPr>
-              <a:t>Pull factors: </a:t>
+              <a:t>Land shortage: </a:t>
             </a:r>
             <a:pPr algn="l" indent="0" marL="0">
               <a:spcAft>
@@ -14416,7 +14811,7 @@
                 <a:ea typeface="Times New Roman" pitchFamily="34" charset="-122"/>
                 <a:cs typeface="Times New Roman" pitchFamily="34" charset="-120"/>
               </a:rPr>
-              <a:t>Jobs, schools, hospitals and modern life in towns attract people.</a:t>
+              <a:t>There is not enough land for young people.</a:t>
             </a:r>
             <a:endParaRPr lang="en-US" sz="4000" dirty="0"/>
           </a:p>
@@ -14593,7 +14988,7 @@
                 <a:ea typeface="Times New Roman" pitchFamily="34" charset="-122"/>
                 <a:cs typeface="Times New Roman" pitchFamily="34" charset="-120"/>
               </a:rPr>
-              <a:t>2. Factors of Rural Exodus (continued)</a:t>
+              <a:t>2. Factors of Rural Exodus</a:t>
             </a:r>
             <a:endParaRPr lang="en-US" sz="3600" dirty="0"/>
           </a:p>
@@ -14607,8 +15002,47 @@
         </p:nvSpPr>
         <p:spPr>
           <a:xfrm>
-            <a:off x="5349240" y="1783080"/>
-            <a:ext cx="6522415" cy="4663440"/>
+            <a:off x="5349240" y="1737360"/>
+            <a:ext cx="6522415" cy="457200"/>
+          </a:xfrm>
+          <a:prstGeom prst="rect">
+            <a:avLst/>
+          </a:prstGeom>
+          <a:noFill/>
+          <a:ln/>
+        </p:spPr>
+        <p:txBody>
+          <a:bodyPr wrap="square" lIns="0" tIns="0" rIns="0" bIns="0" rtlCol="0" anchor="ctr"/>
+          <a:lstStyle/>
+          <a:p>
+            <a:pPr algn="l" indent="0" marL="0">
+              <a:buNone/>
+            </a:pPr>
+            <a:r>
+              <a:rPr lang="en-US" sz="3200" b="1" dirty="0">
+                <a:solidFill>
+                  <a:srgbClr val="990011"/>
+                </a:solidFill>
+                <a:latin typeface="Times New Roman" pitchFamily="34" charset="0"/>
+                <a:ea typeface="Times New Roman" pitchFamily="34" charset="-122"/>
+                <a:cs typeface="Times New Roman" pitchFamily="34" charset="-120"/>
+              </a:rPr>
+              <a:t>A) Push Factors (continued)</a:t>
+            </a:r>
+            <a:endParaRPr lang="en-US" sz="3200" dirty="0"/>
+          </a:p>
+        </p:txBody>
+      </p:sp>
+      <p:sp>
+        <p:nvSpPr>
+          <p:cNvPr id="6" name="Text 3"/>
+          <p:cNvSpPr/>
+          <p:nvPr/>
+        </p:nvSpPr>
+        <p:spPr>
+          <a:xfrm>
+            <a:off x="5349240" y="2240280"/>
+            <a:ext cx="6522415" cy="4206240"/>
           </a:xfrm>
           <a:prstGeom prst="rect">
             <a:avLst/>
@@ -14635,7 +15069,7 @@
                 <a:ea typeface="Times New Roman" pitchFamily="34" charset="-122"/>
                 <a:cs typeface="Times New Roman" pitchFamily="34" charset="-120"/>
               </a:rPr>
-              <a:t>Solutions: </a:t>
+              <a:t>Lack of amenities: </a:t>
             </a:r>
             <a:pPr algn="l" indent="0" marL="0">
               <a:spcAft>
@@ -14652,7 +15086,44 @@
                 <a:ea typeface="Times New Roman" pitchFamily="34" charset="-122"/>
                 <a:cs typeface="Times New Roman" pitchFamily="34" charset="-120"/>
               </a:rPr>
-              <a:t>Rural development, amenities and cultural festivals keep people in villages.</a:t>
+              <a:t>Villages lack water, electricity and hospitals.</a:t>
+            </a:r>
+            <a:endParaRPr lang="en-US" sz="4000" dirty="0"/>
+          </a:p>
+          <a:p>
+            <a:pPr algn="l" indent="0" marL="0">
+              <a:spcAft>
+                <a:spcPts val="800"/>
+              </a:spcAft>
+              <a:buNone/>
+            </a:pPr>
+            <a:r>
+              <a:rPr lang="en-US" sz="4000" b="1" dirty="0">
+                <a:solidFill>
+                  <a:srgbClr val="111111"/>
+                </a:solidFill>
+                <a:latin typeface="Times New Roman" pitchFamily="34" charset="0"/>
+                <a:ea typeface="Times New Roman" pitchFamily="34" charset="-122"/>
+                <a:cs typeface="Times New Roman" pitchFamily="34" charset="-120"/>
+              </a:rPr>
+              <a:t>Drought and insecurity: </a:t>
+            </a:r>
+            <a:pPr algn="l" indent="0" marL="0">
+              <a:spcAft>
+                <a:spcPts val="800"/>
+              </a:spcAft>
+              <a:buNone/>
+            </a:pPr>
+            <a:r>
+              <a:rPr lang="en-US" sz="4000" dirty="0">
+                <a:solidFill>
+                  <a:srgbClr val="111111"/>
+                </a:solidFill>
+                <a:latin typeface="Times New Roman" pitchFamily="34" charset="0"/>
+                <a:ea typeface="Times New Roman" pitchFamily="34" charset="-122"/>
+                <a:cs typeface="Times New Roman" pitchFamily="34" charset="-120"/>
+              </a:rPr>
+              <a:t>Bad harvests and attacks force people to leave.</a:t>
             </a:r>
             <a:endParaRPr lang="en-US" sz="4000" dirty="0"/>
           </a:p>
@@ -15003,7 +15474,7 @@
                 <a:ea typeface="Calibri" pitchFamily="34" charset="-122"/>
                 <a:cs typeface="Calibri" pitchFamily="34" charset="-120"/>
               </a:rPr>
-              <a:t>FORMATIVE EVALUATION</a:t>
+              <a:t>BOARD SUMMARY</a:t>
             </a:r>
             <a:endParaRPr lang="en-US" sz="1400" dirty="0"/>
           </a:p>
@@ -15026,7 +15497,7 @@
         <p:spPr>
           <a:xfrm>
             <a:off x="0" y="658368"/>
-            <a:ext cx="5120640" cy="5833872"/>
+            <a:ext cx="3840480" cy="5833872"/>
           </a:xfrm>
           <a:prstGeom prst="rect">
             <a:avLst/>
@@ -15041,8 +15512,8 @@
         </p:nvSpPr>
         <p:spPr>
           <a:xfrm>
-            <a:off x="5349240" y="1005840"/>
-            <a:ext cx="6522415" cy="731520"/>
+            <a:off x="4069080" y="1005840"/>
+            <a:ext cx="7802575" cy="731520"/>
           </a:xfrm>
           <a:prstGeom prst="rect">
             <a:avLst/>
@@ -15068,7 +15539,7 @@
                 <a:ea typeface="Times New Roman" pitchFamily="34" charset="-122"/>
                 <a:cs typeface="Times New Roman" pitchFamily="34" charset="-120"/>
               </a:rPr>
-              <a:t>Evaluation 1</a:t>
+              <a:t>2. Factors of Rural Exodus</a:t>
             </a:r>
             <a:endParaRPr lang="en-US" sz="3600" dirty="0"/>
           </a:p>
@@ -15082,8 +15553,47 @@
         </p:nvSpPr>
         <p:spPr>
           <a:xfrm>
-            <a:off x="5349240" y="1783080"/>
-            <a:ext cx="6522415" cy="4663440"/>
+            <a:off x="4069080" y="1737360"/>
+            <a:ext cx="7802575" cy="457200"/>
+          </a:xfrm>
+          <a:prstGeom prst="rect">
+            <a:avLst/>
+          </a:prstGeom>
+          <a:noFill/>
+          <a:ln/>
+        </p:spPr>
+        <p:txBody>
+          <a:bodyPr wrap="square" lIns="0" tIns="0" rIns="0" bIns="0" rtlCol="0" anchor="ctr"/>
+          <a:lstStyle/>
+          <a:p>
+            <a:pPr algn="l" indent="0" marL="0">
+              <a:buNone/>
+            </a:pPr>
+            <a:r>
+              <a:rPr lang="en-US" sz="3200" b="1" dirty="0">
+                <a:solidFill>
+                  <a:srgbClr val="990011"/>
+                </a:solidFill>
+                <a:latin typeface="Times New Roman" pitchFamily="34" charset="0"/>
+                <a:ea typeface="Times New Roman" pitchFamily="34" charset="-122"/>
+                <a:cs typeface="Times New Roman" pitchFamily="34" charset="-120"/>
+              </a:rPr>
+              <a:t>B) Pull Factors</a:t>
+            </a:r>
+            <a:endParaRPr lang="en-US" sz="3200" dirty="0"/>
+          </a:p>
+        </p:txBody>
+      </p:sp>
+      <p:sp>
+        <p:nvSpPr>
+          <p:cNvPr id="6" name="Text 3"/>
+          <p:cNvSpPr/>
+          <p:nvPr/>
+        </p:nvSpPr>
+        <p:spPr>
+          <a:xfrm>
+            <a:off x="4069080" y="2240280"/>
+            <a:ext cx="7802575" cy="4206240"/>
           </a:xfrm>
           <a:prstGeom prst="rect">
             <a:avLst/>
@@ -15102,7 +15612,7 @@
               <a:buNone/>
             </a:pPr>
             <a:r>
-              <a:rPr lang="en-US" sz="4000" dirty="0">
+              <a:rPr lang="en-US" sz="4000" i="1" dirty="0">
                 <a:solidFill>
                   <a:srgbClr val="111111"/>
                 </a:solidFill>
@@ -15110,7 +15620,81 @@
                 <a:ea typeface="Times New Roman" pitchFamily="34" charset="-122"/>
                 <a:cs typeface="Times New Roman" pitchFamily="34" charset="-120"/>
               </a:rPr>
-              <a:t>Name two destinations of migrants in Cameroon.</a:t>
+              <a:t>People are attracted to towns by the following factors:</a:t>
+            </a:r>
+            <a:endParaRPr lang="en-US" sz="4000" dirty="0"/>
+          </a:p>
+          <a:p>
+            <a:pPr algn="l" indent="0" marL="0">
+              <a:spcAft>
+                <a:spcPts val="800"/>
+              </a:spcAft>
+              <a:buNone/>
+            </a:pPr>
+            <a:r>
+              <a:rPr lang="en-US" sz="4000" b="1" dirty="0">
+                <a:solidFill>
+                  <a:srgbClr val="111111"/>
+                </a:solidFill>
+                <a:latin typeface="Times New Roman" pitchFamily="34" charset="0"/>
+                <a:ea typeface="Times New Roman" pitchFamily="34" charset="-122"/>
+                <a:cs typeface="Times New Roman" pitchFamily="34" charset="-120"/>
+              </a:rPr>
+              <a:t>Jobs: </a:t>
+            </a:r>
+            <a:pPr algn="l" indent="0" marL="0">
+              <a:spcAft>
+                <a:spcPts val="800"/>
+              </a:spcAft>
+              <a:buNone/>
+            </a:pPr>
+            <a:r>
+              <a:rPr lang="en-US" sz="4000" dirty="0">
+                <a:solidFill>
+                  <a:srgbClr val="111111"/>
+                </a:solidFill>
+                <a:latin typeface="Times New Roman" pitchFamily="34" charset="0"/>
+                <a:ea typeface="Times New Roman" pitchFamily="34" charset="-122"/>
+                <a:cs typeface="Times New Roman" pitchFamily="34" charset="-120"/>
+              </a:rPr>
+              <a:t>Towns offer paid work.</a:t>
+            </a:r>
+            <a:endParaRPr lang="en-US" sz="4000" dirty="0"/>
+          </a:p>
+          <a:p>
+            <a:pPr algn="l" indent="0" marL="0">
+              <a:spcAft>
+                <a:spcPts val="800"/>
+              </a:spcAft>
+              <a:buNone/>
+            </a:pPr>
+            <a:r>
+              <a:rPr lang="en-US" sz="4000" b="1" dirty="0">
+                <a:solidFill>
+                  <a:srgbClr val="111111"/>
+                </a:solidFill>
+                <a:latin typeface="Times New Roman" pitchFamily="34" charset="0"/>
+                <a:ea typeface="Times New Roman" pitchFamily="34" charset="-122"/>
+                <a:cs typeface="Times New Roman" pitchFamily="34" charset="-120"/>
+              </a:rPr>
+              <a:t>Schools and hospitals: </a:t>
+            </a:r>
+            <a:pPr algn="l" indent="0" marL="0">
+              <a:spcAft>
+                <a:spcPts val="800"/>
+              </a:spcAft>
+              <a:buNone/>
+            </a:pPr>
+            <a:r>
+              <a:rPr lang="en-US" sz="4000" dirty="0">
+                <a:solidFill>
+                  <a:srgbClr val="111111"/>
+                </a:solidFill>
+                <a:latin typeface="Times New Roman" pitchFamily="34" charset="0"/>
+                <a:ea typeface="Times New Roman" pitchFamily="34" charset="-122"/>
+                <a:cs typeface="Times New Roman" pitchFamily="34" charset="-120"/>
+              </a:rPr>
+              <a:t>Services are better in towns.</a:t>
             </a:r>
             <a:endParaRPr lang="en-US" sz="4000" dirty="0"/>
           </a:p>
@@ -15222,7 +15806,7 @@
                 <a:ea typeface="Calibri" pitchFamily="34" charset="-122"/>
                 <a:cs typeface="Calibri" pitchFamily="34" charset="-120"/>
               </a:rPr>
-              <a:t>FORMATIVE EVALUATION</a:t>
+              <a:t>BOARD SUMMARY</a:t>
             </a:r>
             <a:endParaRPr lang="en-US" sz="1400" dirty="0"/>
           </a:p>
@@ -15287,7 +15871,7 @@
                 <a:ea typeface="Times New Roman" pitchFamily="34" charset="-122"/>
                 <a:cs typeface="Times New Roman" pitchFamily="34" charset="-120"/>
               </a:rPr>
-              <a:t>Expected Answer</a:t>
+              <a:t>2. Factors of Rural Exodus</a:t>
             </a:r>
             <a:endParaRPr lang="en-US" sz="3600" dirty="0"/>
           </a:p>
@@ -15301,8 +15885,47 @@
         </p:nvSpPr>
         <p:spPr>
           <a:xfrm>
-            <a:off x="5349240" y="1783080"/>
-            <a:ext cx="6522415" cy="4663440"/>
+            <a:off x="5349240" y="1737360"/>
+            <a:ext cx="6522415" cy="457200"/>
+          </a:xfrm>
+          <a:prstGeom prst="rect">
+            <a:avLst/>
+          </a:prstGeom>
+          <a:noFill/>
+          <a:ln/>
+        </p:spPr>
+        <p:txBody>
+          <a:bodyPr wrap="square" lIns="0" tIns="0" rIns="0" bIns="0" rtlCol="0" anchor="ctr"/>
+          <a:lstStyle/>
+          <a:p>
+            <a:pPr algn="l" indent="0" marL="0">
+              <a:buNone/>
+            </a:pPr>
+            <a:r>
+              <a:rPr lang="en-US" sz="3200" b="1" dirty="0">
+                <a:solidFill>
+                  <a:srgbClr val="990011"/>
+                </a:solidFill>
+                <a:latin typeface="Times New Roman" pitchFamily="34" charset="0"/>
+                <a:ea typeface="Times New Roman" pitchFamily="34" charset="-122"/>
+                <a:cs typeface="Times New Roman" pitchFamily="34" charset="-120"/>
+              </a:rPr>
+              <a:t>B) Pull Factors (continued)</a:t>
+            </a:r>
+            <a:endParaRPr lang="en-US" sz="3200" dirty="0"/>
+          </a:p>
+        </p:txBody>
+      </p:sp>
+      <p:sp>
+        <p:nvSpPr>
+          <p:cNvPr id="6" name="Text 3"/>
+          <p:cNvSpPr/>
+          <p:nvPr/>
+        </p:nvSpPr>
+        <p:spPr>
+          <a:xfrm>
+            <a:off x="5349240" y="2240280"/>
+            <a:ext cx="6522415" cy="4206240"/>
           </a:xfrm>
           <a:prstGeom prst="rect">
             <a:avLst/>
@@ -15321,7 +15944,7 @@
               <a:buNone/>
             </a:pPr>
             <a:r>
-              <a:rPr lang="en-US" sz="4000" dirty="0">
+              <a:rPr lang="en-US" sz="4000" b="1" dirty="0">
                 <a:solidFill>
                   <a:srgbClr val="111111"/>
                 </a:solidFill>
@@ -15329,7 +15952,24 @@
                 <a:ea typeface="Times New Roman" pitchFamily="34" charset="-122"/>
                 <a:cs typeface="Times New Roman" pitchFamily="34" charset="-120"/>
               </a:rPr>
-              <a:t>Douala and Yaoundé.</a:t>
+              <a:t>Modern life: </a:t>
+            </a:r>
+            <a:pPr algn="l" indent="0" marL="0">
+              <a:spcAft>
+                <a:spcPts val="800"/>
+              </a:spcAft>
+              <a:buNone/>
+            </a:pPr>
+            <a:r>
+              <a:rPr lang="en-US" sz="4000" dirty="0">
+                <a:solidFill>
+                  <a:srgbClr val="111111"/>
+                </a:solidFill>
+                <a:latin typeface="Times New Roman" pitchFamily="34" charset="0"/>
+                <a:ea typeface="Times New Roman" pitchFamily="34" charset="-122"/>
+                <a:cs typeface="Times New Roman" pitchFamily="34" charset="-120"/>
+              </a:rPr>
+              <a:t>Electricity, entertainment and shops attract young people.</a:t>
             </a:r>
             <a:endParaRPr lang="en-US" sz="4000" dirty="0"/>
           </a:p>
@@ -15441,7 +16081,7 @@
                 <a:ea typeface="Calibri" pitchFamily="34" charset="-122"/>
                 <a:cs typeface="Calibri" pitchFamily="34" charset="-120"/>
               </a:rPr>
-              <a:t>FORMATIVE EVALUATION</a:t>
+              <a:t>BOARD SUMMARY</a:t>
             </a:r>
             <a:endParaRPr lang="en-US" sz="1400" dirty="0"/>
           </a:p>
@@ -15464,7 +16104,7 @@
         <p:spPr>
           <a:xfrm>
             <a:off x="0" y="658368"/>
-            <a:ext cx="5120640" cy="5833872"/>
+            <a:ext cx="1463040" cy="5833872"/>
           </a:xfrm>
           <a:prstGeom prst="rect">
             <a:avLst/>
@@ -15479,8 +16119,8 @@
         </p:nvSpPr>
         <p:spPr>
           <a:xfrm>
-            <a:off x="5349240" y="1005840"/>
-            <a:ext cx="6522415" cy="731520"/>
+            <a:off x="1691640" y="1005840"/>
+            <a:ext cx="10180015" cy="731520"/>
           </a:xfrm>
           <a:prstGeom prst="rect">
             <a:avLst/>
@@ -15506,7 +16146,7 @@
                 <a:ea typeface="Times New Roman" pitchFamily="34" charset="-122"/>
                 <a:cs typeface="Times New Roman" pitchFamily="34" charset="-120"/>
               </a:rPr>
-              <a:t>Evaluation 2</a:t>
+              <a:t>2. Factors of Rural Exodus</a:t>
             </a:r>
             <a:endParaRPr lang="en-US" sz="3600" dirty="0"/>
           </a:p>
@@ -15520,8 +16160,47 @@
         </p:nvSpPr>
         <p:spPr>
           <a:xfrm>
-            <a:off x="5349240" y="1783080"/>
-            <a:ext cx="6522415" cy="4663440"/>
+            <a:off x="1691640" y="1737360"/>
+            <a:ext cx="10180015" cy="457200"/>
+          </a:xfrm>
+          <a:prstGeom prst="rect">
+            <a:avLst/>
+          </a:prstGeom>
+          <a:noFill/>
+          <a:ln/>
+        </p:spPr>
+        <p:txBody>
+          <a:bodyPr wrap="square" lIns="0" tIns="0" rIns="0" bIns="0" rtlCol="0" anchor="ctr"/>
+          <a:lstStyle/>
+          <a:p>
+            <a:pPr algn="l" indent="0" marL="0">
+              <a:buNone/>
+            </a:pPr>
+            <a:r>
+              <a:rPr lang="en-US" sz="3200" b="1" dirty="0">
+                <a:solidFill>
+                  <a:srgbClr val="990011"/>
+                </a:solidFill>
+                <a:latin typeface="Times New Roman" pitchFamily="34" charset="0"/>
+                <a:ea typeface="Times New Roman" pitchFamily="34" charset="-122"/>
+                <a:cs typeface="Times New Roman" pitchFamily="34" charset="-120"/>
+              </a:rPr>
+              <a:t>C) Solutions</a:t>
+            </a:r>
+            <a:endParaRPr lang="en-US" sz="3200" dirty="0"/>
+          </a:p>
+        </p:txBody>
+      </p:sp>
+      <p:sp>
+        <p:nvSpPr>
+          <p:cNvPr id="6" name="Text 3"/>
+          <p:cNvSpPr/>
+          <p:nvPr/>
+        </p:nvSpPr>
+        <p:spPr>
+          <a:xfrm>
+            <a:off x="1691640" y="2240280"/>
+            <a:ext cx="10180015" cy="4206240"/>
           </a:xfrm>
           <a:prstGeom prst="rect">
             <a:avLst/>
@@ -15540,7 +16219,7 @@
               <a:buNone/>
             </a:pPr>
             <a:r>
-              <a:rPr lang="en-US" sz="4000" dirty="0">
+              <a:rPr lang="en-US" sz="4000" i="1" dirty="0">
                 <a:solidFill>
                   <a:srgbClr val="111111"/>
                 </a:solidFill>
@@ -15548,7 +16227,81 @@
                 <a:ea typeface="Times New Roman" pitchFamily="34" charset="-122"/>
                 <a:cs typeface="Times New Roman" pitchFamily="34" charset="-120"/>
               </a:rPr>
-              <a:t>Give two push and two pull factors.</a:t>
+              <a:t>Rural exodus can be reduced by the following solutions:</a:t>
+            </a:r>
+            <a:endParaRPr lang="en-US" sz="4000" dirty="0"/>
+          </a:p>
+          <a:p>
+            <a:pPr algn="l" indent="0" marL="0">
+              <a:spcAft>
+                <a:spcPts val="800"/>
+              </a:spcAft>
+              <a:buNone/>
+            </a:pPr>
+            <a:r>
+              <a:rPr lang="en-US" sz="4000" b="1" dirty="0">
+                <a:solidFill>
+                  <a:srgbClr val="111111"/>
+                </a:solidFill>
+                <a:latin typeface="Times New Roman" pitchFamily="34" charset="0"/>
+                <a:ea typeface="Times New Roman" pitchFamily="34" charset="-122"/>
+                <a:cs typeface="Times New Roman" pitchFamily="34" charset="-120"/>
+              </a:rPr>
+              <a:t>Rural development: </a:t>
+            </a:r>
+            <a:pPr algn="l" indent="0" marL="0">
+              <a:spcAft>
+                <a:spcPts val="800"/>
+              </a:spcAft>
+              <a:buNone/>
+            </a:pPr>
+            <a:r>
+              <a:rPr lang="en-US" sz="4000" dirty="0">
+                <a:solidFill>
+                  <a:srgbClr val="111111"/>
+                </a:solidFill>
+                <a:latin typeface="Times New Roman" pitchFamily="34" charset="0"/>
+                <a:ea typeface="Times New Roman" pitchFamily="34" charset="-122"/>
+                <a:cs typeface="Times New Roman" pitchFamily="34" charset="-120"/>
+              </a:rPr>
+              <a:t>Farming projects create jobs in villages.</a:t>
+            </a:r>
+            <a:endParaRPr lang="en-US" sz="4000" dirty="0"/>
+          </a:p>
+          <a:p>
+            <a:pPr algn="l" indent="0" marL="0">
+              <a:spcAft>
+                <a:spcPts val="800"/>
+              </a:spcAft>
+              <a:buNone/>
+            </a:pPr>
+            <a:r>
+              <a:rPr lang="en-US" sz="4000" b="1" dirty="0">
+                <a:solidFill>
+                  <a:srgbClr val="111111"/>
+                </a:solidFill>
+                <a:latin typeface="Times New Roman" pitchFamily="34" charset="0"/>
+                <a:ea typeface="Times New Roman" pitchFamily="34" charset="-122"/>
+                <a:cs typeface="Times New Roman" pitchFamily="34" charset="-120"/>
+              </a:rPr>
+              <a:t>Amenities: </a:t>
+            </a:r>
+            <a:pPr algn="l" indent="0" marL="0">
+              <a:spcAft>
+                <a:spcPts val="800"/>
+              </a:spcAft>
+              <a:buNone/>
+            </a:pPr>
+            <a:r>
+              <a:rPr lang="en-US" sz="4000" dirty="0">
+                <a:solidFill>
+                  <a:srgbClr val="111111"/>
+                </a:solidFill>
+                <a:latin typeface="Times New Roman" pitchFamily="34" charset="0"/>
+                <a:ea typeface="Times New Roman" pitchFamily="34" charset="-122"/>
+                <a:cs typeface="Times New Roman" pitchFamily="34" charset="-120"/>
+              </a:rPr>
+              <a:t>Water, electricity, schools and health centres are built in villages.</a:t>
             </a:r>
             <a:endParaRPr lang="en-US" sz="4000" dirty="0"/>
           </a:p>
@@ -15660,7 +16413,7 @@
                 <a:ea typeface="Calibri" pitchFamily="34" charset="-122"/>
                 <a:cs typeface="Calibri" pitchFamily="34" charset="-120"/>
               </a:rPr>
-              <a:t>FORMATIVE EVALUATION</a:t>
+              <a:t>BOARD SUMMARY</a:t>
             </a:r>
             <a:endParaRPr lang="en-US" sz="1400" dirty="0"/>
           </a:p>
@@ -15725,7 +16478,7 @@
                 <a:ea typeface="Times New Roman" pitchFamily="34" charset="-122"/>
                 <a:cs typeface="Times New Roman" pitchFamily="34" charset="-120"/>
               </a:rPr>
-              <a:t>Expected Answer</a:t>
+              <a:t>2. Factors of Rural Exodus</a:t>
             </a:r>
             <a:endParaRPr lang="en-US" sz="3600" dirty="0"/>
           </a:p>
@@ -15739,8 +16492,47 @@
         </p:nvSpPr>
         <p:spPr>
           <a:xfrm>
-            <a:off x="5349240" y="1783080"/>
-            <a:ext cx="6522415" cy="4663440"/>
+            <a:off x="5349240" y="1737360"/>
+            <a:ext cx="6522415" cy="457200"/>
+          </a:xfrm>
+          <a:prstGeom prst="rect">
+            <a:avLst/>
+          </a:prstGeom>
+          <a:noFill/>
+          <a:ln/>
+        </p:spPr>
+        <p:txBody>
+          <a:bodyPr wrap="square" lIns="0" tIns="0" rIns="0" bIns="0" rtlCol="0" anchor="ctr"/>
+          <a:lstStyle/>
+          <a:p>
+            <a:pPr algn="l" indent="0" marL="0">
+              <a:buNone/>
+            </a:pPr>
+            <a:r>
+              <a:rPr lang="en-US" sz="3200" b="1" dirty="0">
+                <a:solidFill>
+                  <a:srgbClr val="990011"/>
+                </a:solidFill>
+                <a:latin typeface="Times New Roman" pitchFamily="34" charset="0"/>
+                <a:ea typeface="Times New Roman" pitchFamily="34" charset="-122"/>
+                <a:cs typeface="Times New Roman" pitchFamily="34" charset="-120"/>
+              </a:rPr>
+              <a:t>C) Solutions (continued)</a:t>
+            </a:r>
+            <a:endParaRPr lang="en-US" sz="3200" dirty="0"/>
+          </a:p>
+        </p:txBody>
+      </p:sp>
+      <p:sp>
+        <p:nvSpPr>
+          <p:cNvPr id="6" name="Text 3"/>
+          <p:cNvSpPr/>
+          <p:nvPr/>
+        </p:nvSpPr>
+        <p:spPr>
+          <a:xfrm>
+            <a:off x="5349240" y="2240280"/>
+            <a:ext cx="6522415" cy="4206240"/>
           </a:xfrm>
           <a:prstGeom prst="rect">
             <a:avLst/>
@@ -15759,7 +16551,7 @@
               <a:buNone/>
             </a:pPr>
             <a:r>
-              <a:rPr lang="en-US" sz="4000" dirty="0">
+              <a:rPr lang="en-US" sz="4000" b="1" dirty="0">
                 <a:solidFill>
                   <a:srgbClr val="111111"/>
                 </a:solidFill>
@@ -15767,7 +16559,24 @@
                 <a:ea typeface="Times New Roman" pitchFamily="34" charset="-122"/>
                 <a:cs typeface="Times New Roman" pitchFamily="34" charset="-120"/>
               </a:rPr>
-              <a:t>Poverty and land shortage; jobs and schools.</a:t>
+              <a:t>Cultural festivals: </a:t>
+            </a:r>
+            <a:pPr algn="l" indent="0" marL="0">
+              <a:spcAft>
+                <a:spcPts val="800"/>
+              </a:spcAft>
+              <a:buNone/>
+            </a:pPr>
+            <a:r>
+              <a:rPr lang="en-US" sz="4000" dirty="0">
+                <a:solidFill>
+                  <a:srgbClr val="111111"/>
+                </a:solidFill>
+                <a:latin typeface="Times New Roman" pitchFamily="34" charset="0"/>
+                <a:ea typeface="Times New Roman" pitchFamily="34" charset="-122"/>
+                <a:cs typeface="Times New Roman" pitchFamily="34" charset="-120"/>
+              </a:rPr>
+              <a:t>They keep young people attached to their villages.</a:t>
             </a:r>
             <a:endParaRPr lang="en-US" sz="4000" dirty="0"/>
           </a:p>
@@ -15879,7 +16688,7 @@
                 <a:ea typeface="Calibri" pitchFamily="34" charset="-122"/>
                 <a:cs typeface="Calibri" pitchFamily="34" charset="-120"/>
               </a:rPr>
-              <a:t>REMEDIATION</a:t>
+              <a:t>FORMATIVE EVALUATION</a:t>
             </a:r>
             <a:endParaRPr lang="en-US" sz="1400" dirty="0"/>
           </a:p>
@@ -15944,7 +16753,7 @@
                 <a:ea typeface="Times New Roman" pitchFamily="34" charset="-122"/>
                 <a:cs typeface="Times New Roman" pitchFamily="34" charset="-120"/>
               </a:rPr>
-              <a:t>Remediation</a:t>
+              <a:t>Evaluation 1</a:t>
             </a:r>
             <a:endParaRPr lang="en-US" sz="3600" dirty="0"/>
           </a:p>
@@ -15978,7 +16787,7 @@
               <a:buNone/>
             </a:pPr>
             <a:r>
-              <a:rPr lang="en-US" sz="4000" b="1" dirty="0">
+              <a:rPr lang="en-US" sz="4000" dirty="0">
                 <a:solidFill>
                   <a:srgbClr val="111111"/>
                 </a:solidFill>
@@ -15986,51 +16795,7 @@
                 <a:ea typeface="Times New Roman" pitchFamily="34" charset="-122"/>
                 <a:cs typeface="Times New Roman" pitchFamily="34" charset="-120"/>
               </a:rPr>
-              <a:t>Fill in the blanks:</a:t>
-            </a:r>
-            <a:endParaRPr lang="en-US" sz="4000" dirty="0"/>
-          </a:p>
-          <a:p>
-            <a:pPr algn="l" marL="342900" indent="-342900">
-              <a:spcAft>
-                <a:spcPts val="800"/>
-              </a:spcAft>
-              <a:buSzPct val="100000"/>
-              <a:buFont typeface="+mj-lt"/>
-              <a:buAutoNum type="arabicPeriod" startAt="1"/>
-            </a:pPr>
-            <a:r>
-              <a:rPr lang="en-US" sz="4000" dirty="0">
-                <a:solidFill>
-                  <a:srgbClr val="111111"/>
-                </a:solidFill>
-                <a:latin typeface="Times New Roman" pitchFamily="34" charset="0"/>
-                <a:ea typeface="Times New Roman" pitchFamily="34" charset="-122"/>
-                <a:cs typeface="Times New Roman" pitchFamily="34" charset="-120"/>
-              </a:rPr>
-              <a:t>Movement from villages to towns is rural ______.</a:t>
-            </a:r>
-            <a:endParaRPr lang="en-US" sz="4000" dirty="0"/>
-          </a:p>
-          <a:p>
-            <a:pPr algn="l" marL="342900" indent="-342900">
-              <a:spcAft>
-                <a:spcPts val="800"/>
-              </a:spcAft>
-              <a:buSzPct val="100000"/>
-              <a:buFont typeface="+mj-lt"/>
-              <a:buAutoNum type="arabicPeriod" startAt="1"/>
-            </a:pPr>
-            <a:r>
-              <a:rPr lang="en-US" sz="4000" dirty="0">
-                <a:solidFill>
-                  <a:srgbClr val="111111"/>
-                </a:solidFill>
-                <a:latin typeface="Times New Roman" pitchFamily="34" charset="0"/>
-                <a:ea typeface="Times New Roman" pitchFamily="34" charset="-122"/>
-                <a:cs typeface="Times New Roman" pitchFamily="34" charset="-120"/>
-              </a:rPr>
-              <a:t>The biggest pull town of Cameroon is ______.</a:t>
+              <a:t>Name two destinations of migrants in Cameroon.</a:t>
             </a:r>
             <a:endParaRPr lang="en-US" sz="4000" dirty="0"/>
           </a:p>
@@ -16142,7 +16907,7 @@
                 <a:ea typeface="Calibri" pitchFamily="34" charset="-122"/>
                 <a:cs typeface="Calibri" pitchFamily="34" charset="-120"/>
               </a:rPr>
-              <a:t>REMEDIATION</a:t>
+              <a:t>FORMATIVE EVALUATION</a:t>
             </a:r>
             <a:endParaRPr lang="en-US" sz="1400" dirty="0"/>
           </a:p>
@@ -16207,7 +16972,7 @@
                 <a:ea typeface="Times New Roman" pitchFamily="34" charset="-122"/>
                 <a:cs typeface="Times New Roman" pitchFamily="34" charset="-120"/>
               </a:rPr>
-              <a:t>Remediation (continued)</a:t>
+              <a:t>Expected Answer</a:t>
             </a:r>
             <a:endParaRPr lang="en-US" sz="3600" dirty="0"/>
           </a:p>
@@ -16234,13 +16999,11 @@
           <a:bodyPr wrap="square" lIns="0" tIns="0" rIns="0" bIns="0" rtlCol="0" anchor="t"/>
           <a:lstStyle/>
           <a:p>
-            <a:pPr algn="l" marL="342900" indent="-342900">
+            <a:pPr algn="l" indent="0" marL="0">
               <a:spcAft>
                 <a:spcPts val="800"/>
               </a:spcAft>
-              <a:buSzPct val="100000"/>
-              <a:buFont typeface="+mj-lt"/>
-              <a:buAutoNum type="arabicPeriod" startAt="1"/>
+              <a:buNone/>
             </a:pPr>
             <a:r>
               <a:rPr lang="en-US" sz="4000" dirty="0">
@@ -16251,7 +17014,7 @@
                 <a:ea typeface="Times New Roman" pitchFamily="34" charset="-122"/>
                 <a:cs typeface="Times New Roman" pitchFamily="34" charset="-120"/>
               </a:rPr>
-              <a:t>Lack of land in villages is a ______ factor.</a:t>
+              <a:t>Douala and Yaoundé.</a:t>
             </a:r>
             <a:endParaRPr lang="en-US" sz="4000" dirty="0"/>
           </a:p>
@@ -16363,7 +17126,7 @@
                 <a:ea typeface="Calibri" pitchFamily="34" charset="-122"/>
                 <a:cs typeface="Calibri" pitchFamily="34" charset="-120"/>
               </a:rPr>
-              <a:t>HOMEWORK</a:t>
+              <a:t>FORMATIVE EVALUATION</a:t>
             </a:r>
             <a:endParaRPr lang="en-US" sz="1400" dirty="0"/>
           </a:p>
@@ -16428,7 +17191,7 @@
                 <a:ea typeface="Times New Roman" pitchFamily="34" charset="-122"/>
                 <a:cs typeface="Times New Roman" pitchFamily="34" charset="-120"/>
               </a:rPr>
-              <a:t>Homework</a:t>
+              <a:t>Evaluation 2</a:t>
             </a:r>
             <a:endParaRPr lang="en-US" sz="3600" dirty="0"/>
           </a:p>
@@ -16470,7 +17233,7 @@
                 <a:ea typeface="Times New Roman" pitchFamily="34" charset="-122"/>
                 <a:cs typeface="Times New Roman" pitchFamily="34" charset="-120"/>
               </a:rPr>
-              <a:t>Propose three actions to reduce rural exodus in your region.</a:t>
+              <a:t>Give two push and two pull factors.</a:t>
             </a:r>
             <a:endParaRPr lang="en-US" sz="4000" dirty="0"/>
           </a:p>
@@ -16582,7 +17345,7 @@
                 <a:ea typeface="Calibri" pitchFamily="34" charset="-122"/>
                 <a:cs typeface="Calibri" pitchFamily="34" charset="-120"/>
               </a:rPr>
-              <a:t>NEXT LESSON</a:t>
+              <a:t>FORMATIVE EVALUATION</a:t>
             </a:r>
             <a:endParaRPr lang="en-US" sz="1400" dirty="0"/>
           </a:p>
@@ -16647,7 +17410,7 @@
                 <a:ea typeface="Times New Roman" pitchFamily="34" charset="-122"/>
                 <a:cs typeface="Times New Roman" pitchFamily="34" charset="-120"/>
               </a:rPr>
-              <a:t>Next Lesson</a:t>
+              <a:t>Expected Answer</a:t>
             </a:r>
             <a:endParaRPr lang="en-US" sz="3600" dirty="0"/>
           </a:p>
@@ -16671,17 +17434,17 @@
           <a:ln/>
         </p:spPr>
         <p:txBody>
-          <a:bodyPr wrap="square" lIns="0" tIns="0" rIns="0" bIns="0" rtlCol="0" anchor="ctr"/>
-          <a:lstStyle/>
-          <a:p>
-            <a:pPr algn="ctr" indent="0" marL="0">
+          <a:bodyPr wrap="square" lIns="0" tIns="0" rIns="0" bIns="0" rtlCol="0" anchor="t"/>
+          <a:lstStyle/>
+          <a:p>
+            <a:pPr algn="l" indent="0" marL="0">
               <a:spcAft>
                 <a:spcPts val="800"/>
               </a:spcAft>
               <a:buNone/>
             </a:pPr>
             <a:r>
-              <a:rPr lang="en-US" sz="4000" b="1" dirty="0">
+              <a:rPr lang="en-US" sz="4000" dirty="0">
                 <a:solidFill>
                   <a:srgbClr val="111111"/>
                 </a:solidFill>
@@ -16689,27 +17452,7 @@
                 <a:ea typeface="Times New Roman" pitchFamily="34" charset="-122"/>
                 <a:cs typeface="Times New Roman" pitchFamily="34" charset="-120"/>
               </a:rPr>
-              <a:t>Our next lesson will be on:</a:t>
-            </a:r>
-            <a:endParaRPr lang="en-US" sz="4000" dirty="0"/>
-          </a:p>
-          <a:p>
-            <a:pPr algn="ctr" indent="0" marL="0">
-              <a:spcAft>
-                <a:spcPts val="800"/>
-              </a:spcAft>
-              <a:buNone/>
-            </a:pPr>
-            <a:r>
-              <a:rPr lang="en-US" sz="4000" b="1" dirty="0">
-                <a:solidFill>
-                  <a:srgbClr val="990011"/>
-                </a:solidFill>
-                <a:latin typeface="Times New Roman" pitchFamily="34" charset="0"/>
-                <a:ea typeface="Times New Roman" pitchFamily="34" charset="-122"/>
-                <a:cs typeface="Times New Roman" pitchFamily="34" charset="-120"/>
-              </a:rPr>
-              <a:t>Practical Work 4: Calculation of the Determinants of Population Growth (Indices)</a:t>
+              <a:t>Poverty and land shortage; jobs and schools.</a:t>
             </a:r>
             <a:endParaRPr lang="en-US" sz="4000" dirty="0"/>
           </a:p>
@@ -16821,6 +17564,1167 @@
                 <a:ea typeface="Calibri" pitchFamily="34" charset="-122"/>
                 <a:cs typeface="Calibri" pitchFamily="34" charset="-120"/>
               </a:rPr>
+              <a:t>REMEDIATION</a:t>
+            </a:r>
+            <a:endParaRPr lang="en-US" sz="1400" dirty="0"/>
+          </a:p>
+        </p:txBody>
+      </p:sp>
+      <p:pic>
+        <p:nvPicPr>
+          <p:cNvPr id="3" name="Image 0" descr="/home/claude/f4/img/minesec_sheet.png">    </p:cNvPr>
+          <p:cNvPicPr>
+            <a:picLocks noChangeAspect="1"/>
+          </p:cNvPicPr>
+          <p:nvPr/>
+        </p:nvPicPr>
+        <p:blipFill>
+          <a:blip r:embed="rId1"/>
+          <a:stretch>
+            <a:fillRect/>
+          </a:stretch>
+        </p:blipFill>
+        <p:spPr>
+          <a:xfrm>
+            <a:off x="0" y="658368"/>
+            <a:ext cx="5120640" cy="5833872"/>
+          </a:xfrm>
+          <a:prstGeom prst="rect">
+            <a:avLst/>
+          </a:prstGeom>
+        </p:spPr>
+      </p:pic>
+      <p:sp>
+        <p:nvSpPr>
+          <p:cNvPr id="4" name="Text 1"/>
+          <p:cNvSpPr/>
+          <p:nvPr/>
+        </p:nvSpPr>
+        <p:spPr>
+          <a:xfrm>
+            <a:off x="5349240" y="1005840"/>
+            <a:ext cx="6522415" cy="731520"/>
+          </a:xfrm>
+          <a:prstGeom prst="rect">
+            <a:avLst/>
+          </a:prstGeom>
+          <a:noFill/>
+          <a:ln/>
+        </p:spPr>
+        <p:txBody>
+          <a:bodyPr wrap="square" lIns="0" tIns="0" rIns="0" bIns="0" rtlCol="0" anchor="ctr">
+            <a:normAutofit/>
+          </a:bodyPr>
+          <a:lstStyle/>
+          <a:p>
+            <a:pPr algn="ctr" indent="0" marL="0">
+              <a:buNone/>
+            </a:pPr>
+            <a:r>
+              <a:rPr lang="en-US" sz="3600" b="1" dirty="0">
+                <a:solidFill>
+                  <a:srgbClr val="990011"/>
+                </a:solidFill>
+                <a:latin typeface="Times New Roman" pitchFamily="34" charset="0"/>
+                <a:ea typeface="Times New Roman" pitchFamily="34" charset="-122"/>
+                <a:cs typeface="Times New Roman" pitchFamily="34" charset="-120"/>
+              </a:rPr>
+              <a:t>Remediation</a:t>
+            </a:r>
+            <a:endParaRPr lang="en-US" sz="3600" dirty="0"/>
+          </a:p>
+        </p:txBody>
+      </p:sp>
+      <p:sp>
+        <p:nvSpPr>
+          <p:cNvPr id="5" name="Text 2"/>
+          <p:cNvSpPr/>
+          <p:nvPr/>
+        </p:nvSpPr>
+        <p:spPr>
+          <a:xfrm>
+            <a:off x="5349240" y="1783080"/>
+            <a:ext cx="6522415" cy="4663440"/>
+          </a:xfrm>
+          <a:prstGeom prst="rect">
+            <a:avLst/>
+          </a:prstGeom>
+          <a:noFill/>
+          <a:ln/>
+        </p:spPr>
+        <p:txBody>
+          <a:bodyPr wrap="square" lIns="0" tIns="0" rIns="0" bIns="0" rtlCol="0" anchor="t"/>
+          <a:lstStyle/>
+          <a:p>
+            <a:pPr algn="l" indent="0" marL="0">
+              <a:spcAft>
+                <a:spcPts val="800"/>
+              </a:spcAft>
+              <a:buNone/>
+            </a:pPr>
+            <a:r>
+              <a:rPr lang="en-US" sz="4000" b="1" dirty="0">
+                <a:solidFill>
+                  <a:srgbClr val="111111"/>
+                </a:solidFill>
+                <a:latin typeface="Times New Roman" pitchFamily="34" charset="0"/>
+                <a:ea typeface="Times New Roman" pitchFamily="34" charset="-122"/>
+                <a:cs typeface="Times New Roman" pitchFamily="34" charset="-120"/>
+              </a:rPr>
+              <a:t>Fill in the blanks:</a:t>
+            </a:r>
+            <a:endParaRPr lang="en-US" sz="4000" dirty="0"/>
+          </a:p>
+          <a:p>
+            <a:pPr algn="l" marL="342900" indent="-342900">
+              <a:spcAft>
+                <a:spcPts val="800"/>
+              </a:spcAft>
+              <a:buSzPct val="100000"/>
+              <a:buFont typeface="+mj-lt"/>
+              <a:buAutoNum type="arabicPeriod" startAt="1"/>
+            </a:pPr>
+            <a:r>
+              <a:rPr lang="en-US" sz="4000" dirty="0">
+                <a:solidFill>
+                  <a:srgbClr val="111111"/>
+                </a:solidFill>
+                <a:latin typeface="Times New Roman" pitchFamily="34" charset="0"/>
+                <a:ea typeface="Times New Roman" pitchFamily="34" charset="-122"/>
+                <a:cs typeface="Times New Roman" pitchFamily="34" charset="-120"/>
+              </a:rPr>
+              <a:t>Movement from villages to towns is rural ______.</a:t>
+            </a:r>
+            <a:endParaRPr lang="en-US" sz="4000" dirty="0"/>
+          </a:p>
+          <a:p>
+            <a:pPr algn="l" marL="342900" indent="-342900">
+              <a:spcAft>
+                <a:spcPts val="800"/>
+              </a:spcAft>
+              <a:buSzPct val="100000"/>
+              <a:buFont typeface="+mj-lt"/>
+              <a:buAutoNum type="arabicPeriod" startAt="1"/>
+            </a:pPr>
+            <a:r>
+              <a:rPr lang="en-US" sz="4000" dirty="0">
+                <a:solidFill>
+                  <a:srgbClr val="111111"/>
+                </a:solidFill>
+                <a:latin typeface="Times New Roman" pitchFamily="34" charset="0"/>
+                <a:ea typeface="Times New Roman" pitchFamily="34" charset="-122"/>
+                <a:cs typeface="Times New Roman" pitchFamily="34" charset="-120"/>
+              </a:rPr>
+              <a:t>The biggest pull town of Cameroon is ______.</a:t>
+            </a:r>
+            <a:endParaRPr lang="en-US" sz="4000" dirty="0"/>
+          </a:p>
+        </p:txBody>
+      </p:sp>
+      <p:sp>
+        <p:nvSpPr>
+          <p:cNvPr id="25" name="Slide Number Placeholder 0"/>
+          <p:cNvSpPr>
+            <a:spLocks noGrp="1"/>
+          </p:cNvSpPr>
+          <p:nvPr>
+            <p:ph type="sldNum" sz="quarter" idx="4294967295"/>
+          </p:nvPr>
+        </p:nvSpPr>
+        <p:spPr>
+          <a:xfrm>
+            <a:off x="27432" y="91440"/>
+            <a:ext cx="585216" cy="475488"/>
+          </a:xfrm>
+          <a:prstGeom prst="rect">
+            <a:avLst/>
+          </a:prstGeom>
+          <a:extLst>
+            <a:ext uri="{C572A759-6A51-4108-AA02-DFA0A04FC94B}">
+              <ma14:wrappingTextBoxFlag xmlns:ma14="http://schemas.microsoft.com/office/mac/drawingml/2011/main" val="0"/>
+            </a:ext>
+          </a:extLst>
+        </p:spPr>
+        <p:txBody>
+          <a:bodyPr/>
+          <a:lstStyle>
+            <a:lvl1pPr>
+              <a:defRPr sz="2000">
+                <a:solidFill>
+                  <a:srgbClr val="FFFFFF"/>
+                </a:solidFill>
+                <a:latin typeface="Calibri"/>
+                <a:ea typeface="Calibri"/>
+                <a:cs typeface="Calibri"/>
+              </a:defRPr>
+            </a:lvl1pPr>
+          </a:lstStyle>
+          <a:p>
+            <a:pPr algn="ctr"/>
+            <a:fld id="{F7021451-1387-4CA6-816F-3879F97B5CBC}" type="slidenum">
+              <a:rPr b="1" lang="en-US"/>
+              <a:t>48</a:t>
+            </a:fld>
+            <a:endParaRPr lang="en-US"/>
+          </a:p>
+        </p:txBody>
+      </p:sp>
+    </p:spTree>
+  </p:cSld>
+  <p:clrMapOvr>
+    <a:masterClrMapping/>
+  </p:clrMapOvr>
+</p:sld>
+</file>
+
+<file path=ppt/slides/slide49.xml><?xml version="1.0" encoding="utf-8"?>
+<p:sld xmlns:a="http://schemas.openxmlformats.org/drawingml/2006/main" xmlns:r="http://schemas.openxmlformats.org/officeDocument/2006/relationships" xmlns:p="http://schemas.openxmlformats.org/presentationml/2006/main">
+  <p:cSld name="Slide 49">
+    <p:spTree>
+      <p:nvGrpSpPr>
+        <p:cNvPr id="1" name=""/>
+        <p:cNvGrpSpPr/>
+        <p:nvPr/>
+      </p:nvGrpSpPr>
+      <p:grpSpPr>
+        <a:xfrm>
+          <a:off x="0" y="0"/>
+          <a:ext cx="0" cy="0"/>
+          <a:chOff x="0" y="0"/>
+          <a:chExt cx="0" cy="0"/>
+        </a:xfrm>
+      </p:grpSpPr>
+      <p:sp>
+        <p:nvSpPr>
+          <p:cNvPr id="2" name="Text 0"/>
+          <p:cNvSpPr/>
+          <p:nvPr/>
+        </p:nvSpPr>
+        <p:spPr>
+          <a:xfrm>
+            <a:off x="457200" y="713232"/>
+            <a:ext cx="11368735" cy="274320"/>
+          </a:xfrm>
+          <a:prstGeom prst="rect">
+            <a:avLst/>
+          </a:prstGeom>
+          <a:noFill/>
+          <a:ln/>
+        </p:spPr>
+        <p:txBody>
+          <a:bodyPr wrap="square" lIns="0" tIns="0" rIns="0" bIns="0" rtlCol="0" anchor="ctr"/>
+          <a:lstStyle/>
+          <a:p>
+            <a:pPr algn="r" indent="0" marL="0">
+              <a:buNone/>
+            </a:pPr>
+            <a:r>
+              <a:rPr lang="en-US" sz="1400" b="1" dirty="0">
+                <a:solidFill>
+                  <a:srgbClr val="1C3F6E"/>
+                </a:solidFill>
+                <a:latin typeface="Calibri" pitchFamily="34" charset="0"/>
+                <a:ea typeface="Calibri" pitchFamily="34" charset="-122"/>
+                <a:cs typeface="Calibri" pitchFamily="34" charset="-120"/>
+              </a:rPr>
+              <a:t>REMEDIATION</a:t>
+            </a:r>
+            <a:endParaRPr lang="en-US" sz="1400" dirty="0"/>
+          </a:p>
+        </p:txBody>
+      </p:sp>
+      <p:pic>
+        <p:nvPicPr>
+          <p:cNvPr id="3" name="Image 0" descr="/home/claude/f4/img/minesec_sheet.png">    </p:cNvPr>
+          <p:cNvPicPr>
+            <a:picLocks noChangeAspect="1"/>
+          </p:cNvPicPr>
+          <p:nvPr/>
+        </p:nvPicPr>
+        <p:blipFill>
+          <a:blip r:embed="rId1"/>
+          <a:stretch>
+            <a:fillRect/>
+          </a:stretch>
+        </p:blipFill>
+        <p:spPr>
+          <a:xfrm>
+            <a:off x="0" y="658368"/>
+            <a:ext cx="5120640" cy="5833872"/>
+          </a:xfrm>
+          <a:prstGeom prst="rect">
+            <a:avLst/>
+          </a:prstGeom>
+        </p:spPr>
+      </p:pic>
+      <p:sp>
+        <p:nvSpPr>
+          <p:cNvPr id="4" name="Text 1"/>
+          <p:cNvSpPr/>
+          <p:nvPr/>
+        </p:nvSpPr>
+        <p:spPr>
+          <a:xfrm>
+            <a:off x="5349240" y="1005840"/>
+            <a:ext cx="6522415" cy="731520"/>
+          </a:xfrm>
+          <a:prstGeom prst="rect">
+            <a:avLst/>
+          </a:prstGeom>
+          <a:noFill/>
+          <a:ln/>
+        </p:spPr>
+        <p:txBody>
+          <a:bodyPr wrap="square" lIns="0" tIns="0" rIns="0" bIns="0" rtlCol="0" anchor="ctr">
+            <a:normAutofit/>
+          </a:bodyPr>
+          <a:lstStyle/>
+          <a:p>
+            <a:pPr algn="ctr" indent="0" marL="0">
+              <a:buNone/>
+            </a:pPr>
+            <a:r>
+              <a:rPr lang="en-US" sz="3600" b="1" dirty="0">
+                <a:solidFill>
+                  <a:srgbClr val="990011"/>
+                </a:solidFill>
+                <a:latin typeface="Times New Roman" pitchFamily="34" charset="0"/>
+                <a:ea typeface="Times New Roman" pitchFamily="34" charset="-122"/>
+                <a:cs typeface="Times New Roman" pitchFamily="34" charset="-120"/>
+              </a:rPr>
+              <a:t>Remediation (continued)</a:t>
+            </a:r>
+            <a:endParaRPr lang="en-US" sz="3600" dirty="0"/>
+          </a:p>
+        </p:txBody>
+      </p:sp>
+      <p:sp>
+        <p:nvSpPr>
+          <p:cNvPr id="5" name="Text 2"/>
+          <p:cNvSpPr/>
+          <p:nvPr/>
+        </p:nvSpPr>
+        <p:spPr>
+          <a:xfrm>
+            <a:off x="5349240" y="1783080"/>
+            <a:ext cx="6522415" cy="4663440"/>
+          </a:xfrm>
+          <a:prstGeom prst="rect">
+            <a:avLst/>
+          </a:prstGeom>
+          <a:noFill/>
+          <a:ln/>
+        </p:spPr>
+        <p:txBody>
+          <a:bodyPr wrap="square" lIns="0" tIns="0" rIns="0" bIns="0" rtlCol="0" anchor="t"/>
+          <a:lstStyle/>
+          <a:p>
+            <a:pPr algn="l" marL="342900" indent="-342900">
+              <a:spcAft>
+                <a:spcPts val="800"/>
+              </a:spcAft>
+              <a:buSzPct val="100000"/>
+              <a:buFont typeface="+mj-lt"/>
+              <a:buAutoNum type="arabicPeriod" startAt="1"/>
+            </a:pPr>
+            <a:r>
+              <a:rPr lang="en-US" sz="4000" dirty="0">
+                <a:solidFill>
+                  <a:srgbClr val="111111"/>
+                </a:solidFill>
+                <a:latin typeface="Times New Roman" pitchFamily="34" charset="0"/>
+                <a:ea typeface="Times New Roman" pitchFamily="34" charset="-122"/>
+                <a:cs typeface="Times New Roman" pitchFamily="34" charset="-120"/>
+              </a:rPr>
+              <a:t>Lack of land in villages is a ______ factor.</a:t>
+            </a:r>
+            <a:endParaRPr lang="en-US" sz="4000" dirty="0"/>
+          </a:p>
+        </p:txBody>
+      </p:sp>
+      <p:sp>
+        <p:nvSpPr>
+          <p:cNvPr id="25" name="Slide Number Placeholder 0"/>
+          <p:cNvSpPr>
+            <a:spLocks noGrp="1"/>
+          </p:cNvSpPr>
+          <p:nvPr>
+            <p:ph type="sldNum" sz="quarter" idx="4294967295"/>
+          </p:nvPr>
+        </p:nvSpPr>
+        <p:spPr>
+          <a:xfrm>
+            <a:off x="27432" y="91440"/>
+            <a:ext cx="585216" cy="475488"/>
+          </a:xfrm>
+          <a:prstGeom prst="rect">
+            <a:avLst/>
+          </a:prstGeom>
+          <a:extLst>
+            <a:ext uri="{C572A759-6A51-4108-AA02-DFA0A04FC94B}">
+              <ma14:wrappingTextBoxFlag xmlns:ma14="http://schemas.microsoft.com/office/mac/drawingml/2011/main" val="0"/>
+            </a:ext>
+          </a:extLst>
+        </p:spPr>
+        <p:txBody>
+          <a:bodyPr/>
+          <a:lstStyle>
+            <a:lvl1pPr>
+              <a:defRPr sz="2000">
+                <a:solidFill>
+                  <a:srgbClr val="FFFFFF"/>
+                </a:solidFill>
+                <a:latin typeface="Calibri"/>
+                <a:ea typeface="Calibri"/>
+                <a:cs typeface="Calibri"/>
+              </a:defRPr>
+            </a:lvl1pPr>
+          </a:lstStyle>
+          <a:p>
+            <a:pPr algn="ctr"/>
+            <a:fld id="{F7021451-1387-4CA6-816F-3879F97B5CBC}" type="slidenum">
+              <a:rPr b="1" lang="en-US"/>
+              <a:t>49</a:t>
+            </a:fld>
+            <a:endParaRPr lang="en-US"/>
+          </a:p>
+        </p:txBody>
+      </p:sp>
+    </p:spTree>
+  </p:cSld>
+  <p:clrMapOvr>
+    <a:masterClrMapping/>
+  </p:clrMapOvr>
+</p:sld>
+</file>
+
+<file path=ppt/slides/slide5.xml><?xml version="1.0" encoding="utf-8"?>
+<p:sld xmlns:a="http://schemas.openxmlformats.org/drawingml/2006/main" xmlns:r="http://schemas.openxmlformats.org/officeDocument/2006/relationships" xmlns:p="http://schemas.openxmlformats.org/presentationml/2006/main">
+  <p:cSld name="Slide 5">
+    <p:spTree>
+      <p:nvGrpSpPr>
+        <p:cNvPr id="1" name=""/>
+        <p:cNvGrpSpPr/>
+        <p:nvPr/>
+      </p:nvGrpSpPr>
+      <p:grpSpPr>
+        <a:xfrm>
+          <a:off x="0" y="0"/>
+          <a:ext cx="0" cy="0"/>
+          <a:chOff x="0" y="0"/>
+          <a:chExt cx="0" cy="0"/>
+        </a:xfrm>
+      </p:grpSpPr>
+      <p:sp>
+        <p:nvSpPr>
+          <p:cNvPr id="2" name="Text 0"/>
+          <p:cNvSpPr/>
+          <p:nvPr/>
+        </p:nvSpPr>
+        <p:spPr>
+          <a:xfrm>
+            <a:off x="457200" y="713232"/>
+            <a:ext cx="11368735" cy="274320"/>
+          </a:xfrm>
+          <a:prstGeom prst="rect">
+            <a:avLst/>
+          </a:prstGeom>
+          <a:noFill/>
+          <a:ln/>
+        </p:spPr>
+        <p:txBody>
+          <a:bodyPr wrap="square" lIns="0" tIns="0" rIns="0" bIns="0" rtlCol="0" anchor="ctr"/>
+          <a:lstStyle/>
+          <a:p>
+            <a:pPr algn="r" indent="0" marL="0">
+              <a:buNone/>
+            </a:pPr>
+            <a:r>
+              <a:rPr lang="en-US" sz="1400" b="1" dirty="0">
+                <a:solidFill>
+                  <a:srgbClr val="1C3F6E"/>
+                </a:solidFill>
+                <a:latin typeface="Calibri" pitchFamily="34" charset="0"/>
+                <a:ea typeface="Calibri" pitchFamily="34" charset="-122"/>
+                <a:cs typeface="Calibri" pitchFamily="34" charset="-120"/>
+              </a:rPr>
+              <a:t>HOMEWORK CORRECTION</a:t>
+            </a:r>
+            <a:endParaRPr lang="en-US" sz="1400" dirty="0"/>
+          </a:p>
+        </p:txBody>
+      </p:sp>
+      <p:pic>
+        <p:nvPicPr>
+          <p:cNvPr id="3" name="Image 0" descr="/home/claude/f4/img/minesec_sheet.png">    </p:cNvPr>
+          <p:cNvPicPr>
+            <a:picLocks noChangeAspect="1"/>
+          </p:cNvPicPr>
+          <p:nvPr/>
+        </p:nvPicPr>
+        <p:blipFill>
+          <a:blip r:embed="rId1"/>
+          <a:stretch>
+            <a:fillRect/>
+          </a:stretch>
+        </p:blipFill>
+        <p:spPr>
+          <a:xfrm>
+            <a:off x="0" y="658368"/>
+            <a:ext cx="5120640" cy="5833872"/>
+          </a:xfrm>
+          <a:prstGeom prst="rect">
+            <a:avLst/>
+          </a:prstGeom>
+        </p:spPr>
+      </p:pic>
+      <p:sp>
+        <p:nvSpPr>
+          <p:cNvPr id="4" name="Text 1"/>
+          <p:cNvSpPr/>
+          <p:nvPr/>
+        </p:nvSpPr>
+        <p:spPr>
+          <a:xfrm>
+            <a:off x="5349240" y="1005840"/>
+            <a:ext cx="6522415" cy="731520"/>
+          </a:xfrm>
+          <a:prstGeom prst="rect">
+            <a:avLst/>
+          </a:prstGeom>
+          <a:noFill/>
+          <a:ln/>
+        </p:spPr>
+        <p:txBody>
+          <a:bodyPr wrap="square" lIns="0" tIns="0" rIns="0" bIns="0" rtlCol="0" anchor="ctr">
+            <a:normAutofit/>
+          </a:bodyPr>
+          <a:lstStyle/>
+          <a:p>
+            <a:pPr algn="ctr" indent="0" marL="0">
+              <a:buNone/>
+            </a:pPr>
+            <a:r>
+              <a:rPr lang="en-US" sz="3600" b="1" dirty="0">
+                <a:solidFill>
+                  <a:srgbClr val="990011"/>
+                </a:solidFill>
+                <a:latin typeface="Times New Roman" pitchFamily="34" charset="0"/>
+                <a:ea typeface="Times New Roman" pitchFamily="34" charset="-122"/>
+                <a:cs typeface="Times New Roman" pitchFamily="34" charset="-120"/>
+              </a:rPr>
+              <a:t>Correction: Possible Answer</a:t>
+            </a:r>
+            <a:endParaRPr lang="en-US" sz="3600" dirty="0"/>
+          </a:p>
+        </p:txBody>
+      </p:sp>
+      <p:sp>
+        <p:nvSpPr>
+          <p:cNvPr id="5" name="Text 2"/>
+          <p:cNvSpPr/>
+          <p:nvPr/>
+        </p:nvSpPr>
+        <p:spPr>
+          <a:xfrm>
+            <a:off x="5349240" y="1783080"/>
+            <a:ext cx="6522415" cy="4663440"/>
+          </a:xfrm>
+          <a:prstGeom prst="rect">
+            <a:avLst/>
+          </a:prstGeom>
+          <a:noFill/>
+          <a:ln/>
+        </p:spPr>
+        <p:txBody>
+          <a:bodyPr wrap="square" lIns="0" tIns="0" rIns="0" bIns="0" rtlCol="0" anchor="t"/>
+          <a:lstStyle/>
+          <a:p>
+            <a:pPr algn="l" indent="0" marL="0">
+              <a:spcAft>
+                <a:spcPts val="800"/>
+              </a:spcAft>
+              <a:buNone/>
+            </a:pPr>
+            <a:r>
+              <a:rPr lang="en-US" sz="4000" dirty="0">
+                <a:solidFill>
+                  <a:srgbClr val="111111"/>
+                </a:solidFill>
+                <a:latin typeface="Times New Roman" pitchFamily="34" charset="0"/>
+                <a:ea typeface="Times New Roman" pitchFamily="34" charset="-122"/>
+                <a:cs typeface="Times New Roman" pitchFamily="34" charset="-120"/>
+              </a:rPr>
+              <a:t>They served as refuges during wars and raids; the people farm the slopes with terraces; and the climate is healthier than the plains.</a:t>
+            </a:r>
+            <a:endParaRPr lang="en-US" sz="4000" dirty="0"/>
+          </a:p>
+        </p:txBody>
+      </p:sp>
+      <p:sp>
+        <p:nvSpPr>
+          <p:cNvPr id="25" name="Slide Number Placeholder 0"/>
+          <p:cNvSpPr>
+            <a:spLocks noGrp="1"/>
+          </p:cNvSpPr>
+          <p:nvPr>
+            <p:ph type="sldNum" sz="quarter" idx="4294967295"/>
+          </p:nvPr>
+        </p:nvSpPr>
+        <p:spPr>
+          <a:xfrm>
+            <a:off x="27432" y="91440"/>
+            <a:ext cx="585216" cy="475488"/>
+          </a:xfrm>
+          <a:prstGeom prst="rect">
+            <a:avLst/>
+          </a:prstGeom>
+          <a:extLst>
+            <a:ext uri="{C572A759-6A51-4108-AA02-DFA0A04FC94B}">
+              <ma14:wrappingTextBoxFlag xmlns:ma14="http://schemas.microsoft.com/office/mac/drawingml/2011/main" val="0"/>
+            </a:ext>
+          </a:extLst>
+        </p:spPr>
+        <p:txBody>
+          <a:bodyPr/>
+          <a:lstStyle>
+            <a:lvl1pPr>
+              <a:defRPr sz="2000">
+                <a:solidFill>
+                  <a:srgbClr val="FFFFFF"/>
+                </a:solidFill>
+                <a:latin typeface="Calibri"/>
+                <a:ea typeface="Calibri"/>
+                <a:cs typeface="Calibri"/>
+              </a:defRPr>
+            </a:lvl1pPr>
+          </a:lstStyle>
+          <a:p>
+            <a:pPr algn="ctr"/>
+            <a:fld id="{F7021451-1387-4CA6-816F-3879F97B5CBC}" type="slidenum">
+              <a:rPr b="1" lang="en-US"/>
+              <a:t>5</a:t>
+            </a:fld>
+            <a:endParaRPr lang="en-US"/>
+          </a:p>
+        </p:txBody>
+      </p:sp>
+    </p:spTree>
+  </p:cSld>
+  <p:clrMapOvr>
+    <a:masterClrMapping/>
+  </p:clrMapOvr>
+</p:sld>
+</file>
+
+<file path=ppt/slides/slide50.xml><?xml version="1.0" encoding="utf-8"?>
+<p:sld xmlns:a="http://schemas.openxmlformats.org/drawingml/2006/main" xmlns:r="http://schemas.openxmlformats.org/officeDocument/2006/relationships" xmlns:p="http://schemas.openxmlformats.org/presentationml/2006/main">
+  <p:cSld name="Slide 50">
+    <p:spTree>
+      <p:nvGrpSpPr>
+        <p:cNvPr id="1" name=""/>
+        <p:cNvGrpSpPr/>
+        <p:nvPr/>
+      </p:nvGrpSpPr>
+      <p:grpSpPr>
+        <a:xfrm>
+          <a:off x="0" y="0"/>
+          <a:ext cx="0" cy="0"/>
+          <a:chOff x="0" y="0"/>
+          <a:chExt cx="0" cy="0"/>
+        </a:xfrm>
+      </p:grpSpPr>
+      <p:sp>
+        <p:nvSpPr>
+          <p:cNvPr id="2" name="Text 0"/>
+          <p:cNvSpPr/>
+          <p:nvPr/>
+        </p:nvSpPr>
+        <p:spPr>
+          <a:xfrm>
+            <a:off x="457200" y="713232"/>
+            <a:ext cx="11368735" cy="274320"/>
+          </a:xfrm>
+          <a:prstGeom prst="rect">
+            <a:avLst/>
+          </a:prstGeom>
+          <a:noFill/>
+          <a:ln/>
+        </p:spPr>
+        <p:txBody>
+          <a:bodyPr wrap="square" lIns="0" tIns="0" rIns="0" bIns="0" rtlCol="0" anchor="ctr"/>
+          <a:lstStyle/>
+          <a:p>
+            <a:pPr algn="r" indent="0" marL="0">
+              <a:buNone/>
+            </a:pPr>
+            <a:r>
+              <a:rPr lang="en-US" sz="1400" b="1" dirty="0">
+                <a:solidFill>
+                  <a:srgbClr val="1C3F6E"/>
+                </a:solidFill>
+                <a:latin typeface="Calibri" pitchFamily="34" charset="0"/>
+                <a:ea typeface="Calibri" pitchFamily="34" charset="-122"/>
+                <a:cs typeface="Calibri" pitchFamily="34" charset="-120"/>
+              </a:rPr>
+              <a:t>HOMEWORK</a:t>
+            </a:r>
+            <a:endParaRPr lang="en-US" sz="1400" dirty="0"/>
+          </a:p>
+        </p:txBody>
+      </p:sp>
+      <p:pic>
+        <p:nvPicPr>
+          <p:cNvPr id="3" name="Image 0" descr="/home/claude/f4/img/minesec_sheet.png">    </p:cNvPr>
+          <p:cNvPicPr>
+            <a:picLocks noChangeAspect="1"/>
+          </p:cNvPicPr>
+          <p:nvPr/>
+        </p:nvPicPr>
+        <p:blipFill>
+          <a:blip r:embed="rId1"/>
+          <a:stretch>
+            <a:fillRect/>
+          </a:stretch>
+        </p:blipFill>
+        <p:spPr>
+          <a:xfrm>
+            <a:off x="0" y="658368"/>
+            <a:ext cx="5120640" cy="5833872"/>
+          </a:xfrm>
+          <a:prstGeom prst="rect">
+            <a:avLst/>
+          </a:prstGeom>
+        </p:spPr>
+      </p:pic>
+      <p:sp>
+        <p:nvSpPr>
+          <p:cNvPr id="4" name="Text 1"/>
+          <p:cNvSpPr/>
+          <p:nvPr/>
+        </p:nvSpPr>
+        <p:spPr>
+          <a:xfrm>
+            <a:off x="5349240" y="1005840"/>
+            <a:ext cx="6522415" cy="731520"/>
+          </a:xfrm>
+          <a:prstGeom prst="rect">
+            <a:avLst/>
+          </a:prstGeom>
+          <a:noFill/>
+          <a:ln/>
+        </p:spPr>
+        <p:txBody>
+          <a:bodyPr wrap="square" lIns="0" tIns="0" rIns="0" bIns="0" rtlCol="0" anchor="ctr">
+            <a:normAutofit/>
+          </a:bodyPr>
+          <a:lstStyle/>
+          <a:p>
+            <a:pPr algn="ctr" indent="0" marL="0">
+              <a:buNone/>
+            </a:pPr>
+            <a:r>
+              <a:rPr lang="en-US" sz="3600" b="1" dirty="0">
+                <a:solidFill>
+                  <a:srgbClr val="990011"/>
+                </a:solidFill>
+                <a:latin typeface="Times New Roman" pitchFamily="34" charset="0"/>
+                <a:ea typeface="Times New Roman" pitchFamily="34" charset="-122"/>
+                <a:cs typeface="Times New Roman" pitchFamily="34" charset="-120"/>
+              </a:rPr>
+              <a:t>Homework</a:t>
+            </a:r>
+            <a:endParaRPr lang="en-US" sz="3600" dirty="0"/>
+          </a:p>
+        </p:txBody>
+      </p:sp>
+      <p:sp>
+        <p:nvSpPr>
+          <p:cNvPr id="5" name="Text 2"/>
+          <p:cNvSpPr/>
+          <p:nvPr/>
+        </p:nvSpPr>
+        <p:spPr>
+          <a:xfrm>
+            <a:off x="5349240" y="1783080"/>
+            <a:ext cx="6522415" cy="4663440"/>
+          </a:xfrm>
+          <a:prstGeom prst="rect">
+            <a:avLst/>
+          </a:prstGeom>
+          <a:noFill/>
+          <a:ln/>
+        </p:spPr>
+        <p:txBody>
+          <a:bodyPr wrap="square" lIns="0" tIns="0" rIns="0" bIns="0" rtlCol="0" anchor="t"/>
+          <a:lstStyle/>
+          <a:p>
+            <a:pPr algn="l" indent="0" marL="0">
+              <a:spcAft>
+                <a:spcPts val="800"/>
+              </a:spcAft>
+              <a:buNone/>
+            </a:pPr>
+            <a:r>
+              <a:rPr lang="en-US" sz="4000" dirty="0">
+                <a:solidFill>
+                  <a:srgbClr val="111111"/>
+                </a:solidFill>
+                <a:latin typeface="Times New Roman" pitchFamily="34" charset="0"/>
+                <a:ea typeface="Times New Roman" pitchFamily="34" charset="-122"/>
+                <a:cs typeface="Times New Roman" pitchFamily="34" charset="-120"/>
+              </a:rPr>
+              <a:t>Propose three actions to reduce rural exodus in your region.</a:t>
+            </a:r>
+            <a:endParaRPr lang="en-US" sz="4000" dirty="0"/>
+          </a:p>
+        </p:txBody>
+      </p:sp>
+      <p:sp>
+        <p:nvSpPr>
+          <p:cNvPr id="25" name="Slide Number Placeholder 0"/>
+          <p:cNvSpPr>
+            <a:spLocks noGrp="1"/>
+          </p:cNvSpPr>
+          <p:nvPr>
+            <p:ph type="sldNum" sz="quarter" idx="4294967295"/>
+          </p:nvPr>
+        </p:nvSpPr>
+        <p:spPr>
+          <a:xfrm>
+            <a:off x="27432" y="91440"/>
+            <a:ext cx="585216" cy="475488"/>
+          </a:xfrm>
+          <a:prstGeom prst="rect">
+            <a:avLst/>
+          </a:prstGeom>
+          <a:extLst>
+            <a:ext uri="{C572A759-6A51-4108-AA02-DFA0A04FC94B}">
+              <ma14:wrappingTextBoxFlag xmlns:ma14="http://schemas.microsoft.com/office/mac/drawingml/2011/main" val="0"/>
+            </a:ext>
+          </a:extLst>
+        </p:spPr>
+        <p:txBody>
+          <a:bodyPr/>
+          <a:lstStyle>
+            <a:lvl1pPr>
+              <a:defRPr sz="2000">
+                <a:solidFill>
+                  <a:srgbClr val="FFFFFF"/>
+                </a:solidFill>
+                <a:latin typeface="Calibri"/>
+                <a:ea typeface="Calibri"/>
+                <a:cs typeface="Calibri"/>
+              </a:defRPr>
+            </a:lvl1pPr>
+          </a:lstStyle>
+          <a:p>
+            <a:pPr algn="ctr"/>
+            <a:fld id="{F7021451-1387-4CA6-816F-3879F97B5CBC}" type="slidenum">
+              <a:rPr b="1" lang="en-US"/>
+              <a:t>50</a:t>
+            </a:fld>
+            <a:endParaRPr lang="en-US"/>
+          </a:p>
+        </p:txBody>
+      </p:sp>
+    </p:spTree>
+  </p:cSld>
+  <p:clrMapOvr>
+    <a:masterClrMapping/>
+  </p:clrMapOvr>
+</p:sld>
+</file>
+
+<file path=ppt/slides/slide51.xml><?xml version="1.0" encoding="utf-8"?>
+<p:sld xmlns:a="http://schemas.openxmlformats.org/drawingml/2006/main" xmlns:r="http://schemas.openxmlformats.org/officeDocument/2006/relationships" xmlns:p="http://schemas.openxmlformats.org/presentationml/2006/main">
+  <p:cSld name="Slide 51">
+    <p:spTree>
+      <p:nvGrpSpPr>
+        <p:cNvPr id="1" name=""/>
+        <p:cNvGrpSpPr/>
+        <p:nvPr/>
+      </p:nvGrpSpPr>
+      <p:grpSpPr>
+        <a:xfrm>
+          <a:off x="0" y="0"/>
+          <a:ext cx="0" cy="0"/>
+          <a:chOff x="0" y="0"/>
+          <a:chExt cx="0" cy="0"/>
+        </a:xfrm>
+      </p:grpSpPr>
+      <p:sp>
+        <p:nvSpPr>
+          <p:cNvPr id="2" name="Text 0"/>
+          <p:cNvSpPr/>
+          <p:nvPr/>
+        </p:nvSpPr>
+        <p:spPr>
+          <a:xfrm>
+            <a:off x="457200" y="713232"/>
+            <a:ext cx="11368735" cy="274320"/>
+          </a:xfrm>
+          <a:prstGeom prst="rect">
+            <a:avLst/>
+          </a:prstGeom>
+          <a:noFill/>
+          <a:ln/>
+        </p:spPr>
+        <p:txBody>
+          <a:bodyPr wrap="square" lIns="0" tIns="0" rIns="0" bIns="0" rtlCol="0" anchor="ctr"/>
+          <a:lstStyle/>
+          <a:p>
+            <a:pPr algn="r" indent="0" marL="0">
+              <a:buNone/>
+            </a:pPr>
+            <a:r>
+              <a:rPr lang="en-US" sz="1400" b="1" dirty="0">
+                <a:solidFill>
+                  <a:srgbClr val="1C3F6E"/>
+                </a:solidFill>
+                <a:latin typeface="Calibri" pitchFamily="34" charset="0"/>
+                <a:ea typeface="Calibri" pitchFamily="34" charset="-122"/>
+                <a:cs typeface="Calibri" pitchFamily="34" charset="-120"/>
+              </a:rPr>
+              <a:t>NEXT LESSON</a:t>
+            </a:r>
+            <a:endParaRPr lang="en-US" sz="1400" dirty="0"/>
+          </a:p>
+        </p:txBody>
+      </p:sp>
+      <p:pic>
+        <p:nvPicPr>
+          <p:cNvPr id="3" name="Image 0" descr="/home/claude/f4/img/minesec_sheet.png">    </p:cNvPr>
+          <p:cNvPicPr>
+            <a:picLocks noChangeAspect="1"/>
+          </p:cNvPicPr>
+          <p:nvPr/>
+        </p:nvPicPr>
+        <p:blipFill>
+          <a:blip r:embed="rId1"/>
+          <a:stretch>
+            <a:fillRect/>
+          </a:stretch>
+        </p:blipFill>
+        <p:spPr>
+          <a:xfrm>
+            <a:off x="0" y="658368"/>
+            <a:ext cx="5120640" cy="5833872"/>
+          </a:xfrm>
+          <a:prstGeom prst="rect">
+            <a:avLst/>
+          </a:prstGeom>
+        </p:spPr>
+      </p:pic>
+      <p:sp>
+        <p:nvSpPr>
+          <p:cNvPr id="4" name="Text 1"/>
+          <p:cNvSpPr/>
+          <p:nvPr/>
+        </p:nvSpPr>
+        <p:spPr>
+          <a:xfrm>
+            <a:off x="5349240" y="1005840"/>
+            <a:ext cx="6522415" cy="731520"/>
+          </a:xfrm>
+          <a:prstGeom prst="rect">
+            <a:avLst/>
+          </a:prstGeom>
+          <a:noFill/>
+          <a:ln/>
+        </p:spPr>
+        <p:txBody>
+          <a:bodyPr wrap="square" lIns="0" tIns="0" rIns="0" bIns="0" rtlCol="0" anchor="ctr">
+            <a:normAutofit/>
+          </a:bodyPr>
+          <a:lstStyle/>
+          <a:p>
+            <a:pPr algn="ctr" indent="0" marL="0">
+              <a:buNone/>
+            </a:pPr>
+            <a:r>
+              <a:rPr lang="en-US" sz="3600" b="1" dirty="0">
+                <a:solidFill>
+                  <a:srgbClr val="990011"/>
+                </a:solidFill>
+                <a:latin typeface="Times New Roman" pitchFamily="34" charset="0"/>
+                <a:ea typeface="Times New Roman" pitchFamily="34" charset="-122"/>
+                <a:cs typeface="Times New Roman" pitchFamily="34" charset="-120"/>
+              </a:rPr>
+              <a:t>Next Lesson</a:t>
+            </a:r>
+            <a:endParaRPr lang="en-US" sz="3600" dirty="0"/>
+          </a:p>
+        </p:txBody>
+      </p:sp>
+      <p:sp>
+        <p:nvSpPr>
+          <p:cNvPr id="5" name="Text 2"/>
+          <p:cNvSpPr/>
+          <p:nvPr/>
+        </p:nvSpPr>
+        <p:spPr>
+          <a:xfrm>
+            <a:off x="5349240" y="1783080"/>
+            <a:ext cx="6522415" cy="4663440"/>
+          </a:xfrm>
+          <a:prstGeom prst="rect">
+            <a:avLst/>
+          </a:prstGeom>
+          <a:noFill/>
+          <a:ln/>
+        </p:spPr>
+        <p:txBody>
+          <a:bodyPr wrap="square" lIns="0" tIns="0" rIns="0" bIns="0" rtlCol="0" anchor="ctr"/>
+          <a:lstStyle/>
+          <a:p>
+            <a:pPr algn="ctr" indent="0" marL="0">
+              <a:spcAft>
+                <a:spcPts val="800"/>
+              </a:spcAft>
+              <a:buNone/>
+            </a:pPr>
+            <a:r>
+              <a:rPr lang="en-US" sz="4000" b="1" dirty="0">
+                <a:solidFill>
+                  <a:srgbClr val="111111"/>
+                </a:solidFill>
+                <a:latin typeface="Times New Roman" pitchFamily="34" charset="0"/>
+                <a:ea typeface="Times New Roman" pitchFamily="34" charset="-122"/>
+                <a:cs typeface="Times New Roman" pitchFamily="34" charset="-120"/>
+              </a:rPr>
+              <a:t>Our next lesson will be on:</a:t>
+            </a:r>
+            <a:endParaRPr lang="en-US" sz="4000" dirty="0"/>
+          </a:p>
+          <a:p>
+            <a:pPr algn="ctr" indent="0" marL="0">
+              <a:spcAft>
+                <a:spcPts val="800"/>
+              </a:spcAft>
+              <a:buNone/>
+            </a:pPr>
+            <a:r>
+              <a:rPr lang="en-US" sz="4000" b="1" dirty="0">
+                <a:solidFill>
+                  <a:srgbClr val="990011"/>
+                </a:solidFill>
+                <a:latin typeface="Times New Roman" pitchFamily="34" charset="0"/>
+                <a:ea typeface="Times New Roman" pitchFamily="34" charset="-122"/>
+                <a:cs typeface="Times New Roman" pitchFamily="34" charset="-120"/>
+              </a:rPr>
+              <a:t>Practical Work 4: Calculation of the Determinants of Population Growth (Indices)</a:t>
+            </a:r>
+            <a:endParaRPr lang="en-US" sz="4000" dirty="0"/>
+          </a:p>
+        </p:txBody>
+      </p:sp>
+      <p:sp>
+        <p:nvSpPr>
+          <p:cNvPr id="25" name="Slide Number Placeholder 0"/>
+          <p:cNvSpPr>
+            <a:spLocks noGrp="1"/>
+          </p:cNvSpPr>
+          <p:nvPr>
+            <p:ph type="sldNum" sz="quarter" idx="4294967295"/>
+          </p:nvPr>
+        </p:nvSpPr>
+        <p:spPr>
+          <a:xfrm>
+            <a:off x="27432" y="91440"/>
+            <a:ext cx="585216" cy="475488"/>
+          </a:xfrm>
+          <a:prstGeom prst="rect">
+            <a:avLst/>
+          </a:prstGeom>
+          <a:extLst>
+            <a:ext uri="{C572A759-6A51-4108-AA02-DFA0A04FC94B}">
+              <ma14:wrappingTextBoxFlag xmlns:ma14="http://schemas.microsoft.com/office/mac/drawingml/2011/main" val="0"/>
+            </a:ext>
+          </a:extLst>
+        </p:spPr>
+        <p:txBody>
+          <a:bodyPr/>
+          <a:lstStyle>
+            <a:lvl1pPr>
+              <a:defRPr sz="2000">
+                <a:solidFill>
+                  <a:srgbClr val="FFFFFF"/>
+                </a:solidFill>
+                <a:latin typeface="Calibri"/>
+                <a:ea typeface="Calibri"/>
+                <a:cs typeface="Calibri"/>
+              </a:defRPr>
+            </a:lvl1pPr>
+          </a:lstStyle>
+          <a:p>
+            <a:pPr algn="ctr"/>
+            <a:fld id="{F7021451-1387-4CA6-816F-3879F97B5CBC}" type="slidenum">
+              <a:rPr b="1" lang="en-US"/>
+              <a:t>51</a:t>
+            </a:fld>
+            <a:endParaRPr lang="en-US"/>
+          </a:p>
+        </p:txBody>
+      </p:sp>
+    </p:spTree>
+  </p:cSld>
+  <p:clrMapOvr>
+    <a:masterClrMapping/>
+  </p:clrMapOvr>
+</p:sld>
+</file>
+
+<file path=ppt/slides/slide52.xml><?xml version="1.0" encoding="utf-8"?>
+<p:sld xmlns:a="http://schemas.openxmlformats.org/drawingml/2006/main" xmlns:r="http://schemas.openxmlformats.org/officeDocument/2006/relationships" xmlns:p="http://schemas.openxmlformats.org/presentationml/2006/main">
+  <p:cSld name="Slide 52">
+    <p:spTree>
+      <p:nvGrpSpPr>
+        <p:cNvPr id="1" name=""/>
+        <p:cNvGrpSpPr/>
+        <p:nvPr/>
+      </p:nvGrpSpPr>
+      <p:grpSpPr>
+        <a:xfrm>
+          <a:off x="0" y="0"/>
+          <a:ext cx="0" cy="0"/>
+          <a:chOff x="0" y="0"/>
+          <a:chExt cx="0" cy="0"/>
+        </a:xfrm>
+      </p:grpSpPr>
+      <p:sp>
+        <p:nvSpPr>
+          <p:cNvPr id="2" name="Text 0"/>
+          <p:cNvSpPr/>
+          <p:nvPr/>
+        </p:nvSpPr>
+        <p:spPr>
+          <a:xfrm>
+            <a:off x="457200" y="713232"/>
+            <a:ext cx="11368735" cy="274320"/>
+          </a:xfrm>
+          <a:prstGeom prst="rect">
+            <a:avLst/>
+          </a:prstGeom>
+          <a:noFill/>
+          <a:ln/>
+        </p:spPr>
+        <p:txBody>
+          <a:bodyPr wrap="square" lIns="0" tIns="0" rIns="0" bIns="0" rtlCol="0" anchor="ctr"/>
+          <a:lstStyle/>
+          <a:p>
+            <a:pPr algn="r" indent="0" marL="0">
+              <a:buNone/>
+            </a:pPr>
+            <a:r>
+              <a:rPr lang="en-US" sz="1400" b="1" dirty="0">
+                <a:solidFill>
+                  <a:srgbClr val="1C3F6E"/>
+                </a:solidFill>
+                <a:latin typeface="Calibri" pitchFamily="34" charset="0"/>
+                <a:ea typeface="Calibri" pitchFamily="34" charset="-122"/>
+                <a:cs typeface="Calibri" pitchFamily="34" charset="-120"/>
+              </a:rPr>
               <a:t>BILINGUAL GAME</a:t>
             </a:r>
             <a:endParaRPr lang="en-US" sz="1400" dirty="0"/>
@@ -16868,7 +18772,7 @@
       </p:sp>
       <p:graphicFrame>
         <p:nvGraphicFramePr>
-          <p:cNvPr id="49" name="Table 0"/>
+          <p:cNvPr id="53" name="Table 0"/>
           <p:cNvGraphicFramePr>
             <a:graphicFrameLocks noGrp="1"/>
           </p:cNvGraphicFramePr>
@@ -17904,7 +19808,7 @@
             <a:pPr algn="ctr"/>
             <a:fld id="{F7021451-1387-4CA6-816F-3879F97B5CBC}" type="slidenum">
               <a:rPr b="1" lang="en-US"/>
-              <a:t>48</a:t>
+              <a:t>52</a:t>
             </a:fld>
             <a:endParaRPr lang="en-US"/>
           </a:p>
@@ -17918,9 +19822,9 @@
 </p:sld>
 </file>
 
-<file path=ppt/slides/slide49.xml><?xml version="1.0" encoding="utf-8"?>
+<file path=ppt/slides/slide53.xml><?xml version="1.0" encoding="utf-8"?>
 <p:sld xmlns:a="http://schemas.openxmlformats.org/drawingml/2006/main" xmlns:r="http://schemas.openxmlformats.org/officeDocument/2006/relationships" xmlns:p="http://schemas.openxmlformats.org/presentationml/2006/main">
-  <p:cSld name="Slide 49">
+  <p:cSld name="Slide 53">
     <p:spTree>
       <p:nvGrpSpPr>
         <p:cNvPr id="1" name=""/>
@@ -18015,7 +19919,7 @@
       </p:sp>
       <p:graphicFrame>
         <p:nvGraphicFramePr>
-          <p:cNvPr id="50" name="Table 0"/>
+          <p:cNvPr id="54" name="Table 0"/>
           <p:cNvGraphicFramePr>
             <a:graphicFrameLocks noGrp="1"/>
           </p:cNvGraphicFramePr>
@@ -18637,7 +20541,7 @@
             <a:pPr algn="ctr"/>
             <a:fld id="{F7021451-1387-4CA6-816F-3879F97B5CBC}" type="slidenum">
               <a:rPr b="1" lang="en-US"/>
-              <a:t>49</a:t>
+              <a:t>53</a:t>
             </a:fld>
             <a:endParaRPr lang="en-US"/>
           </a:p>
@@ -18651,9 +20555,9 @@
 </p:sld>
 </file>
 
-<file path=ppt/slides/slide5.xml><?xml version="1.0" encoding="utf-8"?>
+<file path=ppt/slides/slide54.xml><?xml version="1.0" encoding="utf-8"?>
 <p:sld xmlns:a="http://schemas.openxmlformats.org/drawingml/2006/main" xmlns:r="http://schemas.openxmlformats.org/officeDocument/2006/relationships" xmlns:p="http://schemas.openxmlformats.org/presentationml/2006/main">
-  <p:cSld name="Slide 5">
+  <p:cSld name="Slide 54">
     <p:spTree>
       <p:nvGrpSpPr>
         <p:cNvPr id="1" name=""/>
@@ -18701,225 +20605,6 @@
                 <a:ea typeface="Calibri" pitchFamily="34" charset="-122"/>
                 <a:cs typeface="Calibri" pitchFamily="34" charset="-120"/>
               </a:rPr>
-              <a:t>HOMEWORK CORRECTION</a:t>
-            </a:r>
-            <a:endParaRPr lang="en-US" sz="1400" dirty="0"/>
-          </a:p>
-        </p:txBody>
-      </p:sp>
-      <p:pic>
-        <p:nvPicPr>
-          <p:cNvPr id="3" name="Image 0" descr="/home/claude/f4/img/minesec_sheet.png">    </p:cNvPr>
-          <p:cNvPicPr>
-            <a:picLocks noChangeAspect="1"/>
-          </p:cNvPicPr>
-          <p:nvPr/>
-        </p:nvPicPr>
-        <p:blipFill>
-          <a:blip r:embed="rId1"/>
-          <a:stretch>
-            <a:fillRect/>
-          </a:stretch>
-        </p:blipFill>
-        <p:spPr>
-          <a:xfrm>
-            <a:off x="0" y="658368"/>
-            <a:ext cx="5120640" cy="5833872"/>
-          </a:xfrm>
-          <a:prstGeom prst="rect">
-            <a:avLst/>
-          </a:prstGeom>
-        </p:spPr>
-      </p:pic>
-      <p:sp>
-        <p:nvSpPr>
-          <p:cNvPr id="4" name="Text 1"/>
-          <p:cNvSpPr/>
-          <p:nvPr/>
-        </p:nvSpPr>
-        <p:spPr>
-          <a:xfrm>
-            <a:off x="5349240" y="1005840"/>
-            <a:ext cx="6522415" cy="731520"/>
-          </a:xfrm>
-          <a:prstGeom prst="rect">
-            <a:avLst/>
-          </a:prstGeom>
-          <a:noFill/>
-          <a:ln/>
-        </p:spPr>
-        <p:txBody>
-          <a:bodyPr wrap="square" lIns="0" tIns="0" rIns="0" bIns="0" rtlCol="0" anchor="ctr">
-            <a:normAutofit/>
-          </a:bodyPr>
-          <a:lstStyle/>
-          <a:p>
-            <a:pPr algn="ctr" indent="0" marL="0">
-              <a:buNone/>
-            </a:pPr>
-            <a:r>
-              <a:rPr lang="en-US" sz="3600" b="1" dirty="0">
-                <a:solidFill>
-                  <a:srgbClr val="990011"/>
-                </a:solidFill>
-                <a:latin typeface="Times New Roman" pitchFamily="34" charset="0"/>
-                <a:ea typeface="Times New Roman" pitchFamily="34" charset="-122"/>
-                <a:cs typeface="Times New Roman" pitchFamily="34" charset="-120"/>
-              </a:rPr>
-              <a:t>Correction: Possible Answer</a:t>
-            </a:r>
-            <a:endParaRPr lang="en-US" sz="3600" dirty="0"/>
-          </a:p>
-        </p:txBody>
-      </p:sp>
-      <p:sp>
-        <p:nvSpPr>
-          <p:cNvPr id="5" name="Text 2"/>
-          <p:cNvSpPr/>
-          <p:nvPr/>
-        </p:nvSpPr>
-        <p:spPr>
-          <a:xfrm>
-            <a:off x="5349240" y="1783080"/>
-            <a:ext cx="6522415" cy="4663440"/>
-          </a:xfrm>
-          <a:prstGeom prst="rect">
-            <a:avLst/>
-          </a:prstGeom>
-          <a:noFill/>
-          <a:ln/>
-        </p:spPr>
-        <p:txBody>
-          <a:bodyPr wrap="square" lIns="0" tIns="0" rIns="0" bIns="0" rtlCol="0" anchor="t"/>
-          <a:lstStyle/>
-          <a:p>
-            <a:pPr algn="l" indent="0" marL="0">
-              <a:spcAft>
-                <a:spcPts val="800"/>
-              </a:spcAft>
-              <a:buNone/>
-            </a:pPr>
-            <a:r>
-              <a:rPr lang="en-US" sz="4000" dirty="0">
-                <a:solidFill>
-                  <a:srgbClr val="111111"/>
-                </a:solidFill>
-                <a:latin typeface="Times New Roman" pitchFamily="34" charset="0"/>
-                <a:ea typeface="Times New Roman" pitchFamily="34" charset="-122"/>
-                <a:cs typeface="Times New Roman" pitchFamily="34" charset="-120"/>
-              </a:rPr>
-              <a:t>They served as refuges during wars and raids; the people farm the slopes with terraces; and the climate is healthier than the plains.</a:t>
-            </a:r>
-            <a:endParaRPr lang="en-US" sz="4000" dirty="0"/>
-          </a:p>
-        </p:txBody>
-      </p:sp>
-      <p:sp>
-        <p:nvSpPr>
-          <p:cNvPr id="25" name="Slide Number Placeholder 0"/>
-          <p:cNvSpPr>
-            <a:spLocks noGrp="1"/>
-          </p:cNvSpPr>
-          <p:nvPr>
-            <p:ph type="sldNum" sz="quarter" idx="4294967295"/>
-          </p:nvPr>
-        </p:nvSpPr>
-        <p:spPr>
-          <a:xfrm>
-            <a:off x="27432" y="91440"/>
-            <a:ext cx="585216" cy="475488"/>
-          </a:xfrm>
-          <a:prstGeom prst="rect">
-            <a:avLst/>
-          </a:prstGeom>
-          <a:extLst>
-            <a:ext uri="{C572A759-6A51-4108-AA02-DFA0A04FC94B}">
-              <ma14:wrappingTextBoxFlag xmlns:ma14="http://schemas.microsoft.com/office/mac/drawingml/2011/main" val="0"/>
-            </a:ext>
-          </a:extLst>
-        </p:spPr>
-        <p:txBody>
-          <a:bodyPr/>
-          <a:lstStyle>
-            <a:lvl1pPr>
-              <a:defRPr sz="2000">
-                <a:solidFill>
-                  <a:srgbClr val="FFFFFF"/>
-                </a:solidFill>
-                <a:latin typeface="Calibri"/>
-                <a:ea typeface="Calibri"/>
-                <a:cs typeface="Calibri"/>
-              </a:defRPr>
-            </a:lvl1pPr>
-          </a:lstStyle>
-          <a:p>
-            <a:pPr algn="ctr"/>
-            <a:fld id="{F7021451-1387-4CA6-816F-3879F97B5CBC}" type="slidenum">
-              <a:rPr b="1" lang="en-US"/>
-              <a:t>5</a:t>
-            </a:fld>
-            <a:endParaRPr lang="en-US"/>
-          </a:p>
-        </p:txBody>
-      </p:sp>
-    </p:spTree>
-  </p:cSld>
-  <p:clrMapOvr>
-    <a:masterClrMapping/>
-  </p:clrMapOvr>
-</p:sld>
-</file>
-
-<file path=ppt/slides/slide50.xml><?xml version="1.0" encoding="utf-8"?>
-<p:sld xmlns:a="http://schemas.openxmlformats.org/drawingml/2006/main" xmlns:r="http://schemas.openxmlformats.org/officeDocument/2006/relationships" xmlns:p="http://schemas.openxmlformats.org/presentationml/2006/main">
-  <p:cSld name="Slide 50">
-    <p:spTree>
-      <p:nvGrpSpPr>
-        <p:cNvPr id="1" name=""/>
-        <p:cNvGrpSpPr/>
-        <p:nvPr/>
-      </p:nvGrpSpPr>
-      <p:grpSpPr>
-        <a:xfrm>
-          <a:off x="0" y="0"/>
-          <a:ext cx="0" cy="0"/>
-          <a:chOff x="0" y="0"/>
-          <a:chExt cx="0" cy="0"/>
-        </a:xfrm>
-      </p:grpSpPr>
-      <p:sp>
-        <p:nvSpPr>
-          <p:cNvPr id="2" name="Text 0"/>
-          <p:cNvSpPr/>
-          <p:nvPr/>
-        </p:nvSpPr>
-        <p:spPr>
-          <a:xfrm>
-            <a:off x="457200" y="713232"/>
-            <a:ext cx="11368735" cy="274320"/>
-          </a:xfrm>
-          <a:prstGeom prst="rect">
-            <a:avLst/>
-          </a:prstGeom>
-          <a:noFill/>
-          <a:ln/>
-        </p:spPr>
-        <p:txBody>
-          <a:bodyPr wrap="square" lIns="0" tIns="0" rIns="0" bIns="0" rtlCol="0" anchor="ctr"/>
-          <a:lstStyle/>
-          <a:p>
-            <a:pPr algn="r" indent="0" marL="0">
-              <a:buNone/>
-            </a:pPr>
-            <a:r>
-              <a:rPr lang="en-US" sz="1400" b="1" dirty="0">
-                <a:solidFill>
-                  <a:srgbClr val="1C3F6E"/>
-                </a:solidFill>
-                <a:latin typeface="Calibri" pitchFamily="34" charset="0"/>
-                <a:ea typeface="Calibri" pitchFamily="34" charset="-122"/>
-                <a:cs typeface="Calibri" pitchFamily="34" charset="-120"/>
-              </a:rPr>
               <a:t>LOGBOOK</a:t>
             </a:r>
             <a:endParaRPr lang="en-US" sz="1400" dirty="0"/>
@@ -18967,7 +20652,7 @@
       </p:sp>
       <p:graphicFrame>
         <p:nvGraphicFramePr>
-          <p:cNvPr id="51" name="Table 0"/>
+          <p:cNvPr id="55" name="Table 0"/>
           <p:cNvGraphicFramePr>
             <a:graphicFrameLocks noGrp="1"/>
           </p:cNvGraphicFramePr>
@@ -19077,7 +20762,7 @@
                           <a:ea typeface="Calibri" pitchFamily="34" charset="-122"/>
                           <a:cs typeface="Calibri" pitchFamily="34" charset="-120"/>
                         </a:rPr>
-                        <a:t>Migration Zones and Destinations; Factors of Rural Exodus.</a:t>
+                        <a:t>Migration Zones and Destinations; Push Factors; Pull Factors; Solutions.</a:t>
                       </a:r>
                       <a:endParaRPr lang="en-US" sz="1600" dirty="0">
                         <a:latin typeface="Calibri" charset="0"/>
@@ -19727,7 +21412,7 @@
             <a:pPr algn="ctr"/>
             <a:fld id="{F7021451-1387-4CA6-816F-3879F97B5CBC}" type="slidenum">
               <a:rPr b="1" lang="en-US"/>
-              <a:t>50</a:t>
+              <a:t>54</a:t>
             </a:fld>
             <a:endParaRPr lang="en-US"/>
           </a:p>
@@ -19741,9 +21426,9 @@
 </p:sld>
 </file>
 
-<file path=ppt/slides/slide51.xml><?xml version="1.0" encoding="utf-8"?>
+<file path=ppt/slides/slide55.xml><?xml version="1.0" encoding="utf-8"?>
 <p:sld xmlns:a="http://schemas.openxmlformats.org/drawingml/2006/main" xmlns:r="http://schemas.openxmlformats.org/officeDocument/2006/relationships" xmlns:p="http://schemas.openxmlformats.org/presentationml/2006/main">
-  <p:cSld name="Slide 51">
+  <p:cSld name="Slide 55">
     <p:spTree>
       <p:nvGrpSpPr>
         <p:cNvPr id="1" name=""/>
@@ -20052,7 +21737,7 @@
             <a:pPr algn="ctr"/>
             <a:fld id="{F7021451-1387-4CA6-816F-3879F97B5CBC}" type="slidenum">
               <a:rPr b="1" lang="en-US"/>
-              <a:t>51</a:t>
+              <a:t>55</a:t>
             </a:fld>
             <a:endParaRPr lang="en-US"/>
           </a:p>
@@ -20066,9 +21751,9 @@
 </p:sld>
 </file>
 
-<file path=ppt/slides/slide52.xml><?xml version="1.0" encoding="utf-8"?>
+<file path=ppt/slides/slide56.xml><?xml version="1.0" encoding="utf-8"?>
 <p:sld xmlns:a="http://schemas.openxmlformats.org/drawingml/2006/main" xmlns:r="http://schemas.openxmlformats.org/officeDocument/2006/relationships" xmlns:p="http://schemas.openxmlformats.org/presentationml/2006/main">
-  <p:cSld name="Slide 52">
+  <p:cSld name="Slide 56">
     <p:spTree>
       <p:nvGrpSpPr>
         <p:cNvPr id="1" name=""/>
@@ -20356,7 +22041,7 @@
             <a:pPr algn="ctr"/>
             <a:fld id="{F7021451-1387-4CA6-816F-3879F97B5CBC}" type="slidenum">
               <a:rPr b="1" lang="en-US"/>
-              <a:t>52</a:t>
+              <a:t>56</a:t>
             </a:fld>
             <a:endParaRPr lang="en-US"/>
           </a:p>
